--- a/Day-2/OOP_CSharp.pptx
+++ b/Day-2/OOP_CSharp.pptx
@@ -5,27 +5,39 @@
     <p:sldMasterId id="2147483660" r:id="rId1"/>
   </p:sldMasterIdLst>
   <p:sldIdLst>
-    <p:sldId id="256" r:id="rId2"/>
-    <p:sldId id="257" r:id="rId3"/>
-    <p:sldId id="258" r:id="rId4"/>
-    <p:sldId id="259" r:id="rId5"/>
-    <p:sldId id="260" r:id="rId6"/>
-    <p:sldId id="261" r:id="rId7"/>
-    <p:sldId id="262" r:id="rId8"/>
-    <p:sldId id="263" r:id="rId9"/>
-    <p:sldId id="264" r:id="rId10"/>
-    <p:sldId id="265" r:id="rId11"/>
-    <p:sldId id="266" r:id="rId12"/>
-    <p:sldId id="267" r:id="rId13"/>
-    <p:sldId id="268" r:id="rId14"/>
-    <p:sldId id="269" r:id="rId15"/>
-    <p:sldId id="270" r:id="rId16"/>
-    <p:sldId id="271" r:id="rId17"/>
-    <p:sldId id="272" r:id="rId18"/>
-    <p:sldId id="273" r:id="rId19"/>
-    <p:sldId id="274" r:id="rId20"/>
-    <p:sldId id="275" r:id="rId21"/>
-    <p:sldId id="276" r:id="rId22"/>
+    <p:sldId id="277" r:id="rId2"/>
+    <p:sldId id="278" r:id="rId3"/>
+    <p:sldId id="279" r:id="rId4"/>
+    <p:sldId id="288" r:id="rId5"/>
+    <p:sldId id="280" r:id="rId6"/>
+    <p:sldId id="287" r:id="rId7"/>
+    <p:sldId id="281" r:id="rId8"/>
+    <p:sldId id="289" r:id="rId9"/>
+    <p:sldId id="282" r:id="rId10"/>
+    <p:sldId id="283" r:id="rId11"/>
+    <p:sldId id="292" r:id="rId12"/>
+    <p:sldId id="284" r:id="rId13"/>
+    <p:sldId id="291" r:id="rId14"/>
+    <p:sldId id="285" r:id="rId15"/>
+    <p:sldId id="293" r:id="rId16"/>
+    <p:sldId id="294" r:id="rId17"/>
+    <p:sldId id="299" r:id="rId18"/>
+    <p:sldId id="295" r:id="rId19"/>
+    <p:sldId id="302" r:id="rId20"/>
+    <p:sldId id="296" r:id="rId21"/>
+    <p:sldId id="300" r:id="rId22"/>
+    <p:sldId id="301" r:id="rId23"/>
+    <p:sldId id="297" r:id="rId24"/>
+    <p:sldId id="303" r:id="rId25"/>
+    <p:sldId id="304" r:id="rId26"/>
+    <p:sldId id="312" r:id="rId27"/>
+    <p:sldId id="305" r:id="rId28"/>
+    <p:sldId id="306" r:id="rId29"/>
+    <p:sldId id="313" r:id="rId30"/>
+    <p:sldId id="307" r:id="rId31"/>
+    <p:sldId id="315" r:id="rId32"/>
+    <p:sldId id="308" r:id="rId33"/>
+    <p:sldId id="314" r:id="rId34"/>
   </p:sldIdLst>
   <p:sldSz cx="9144000" cy="6858000" type="screen4x3"/>
   <p:notesSz cx="6858000" cy="9144000"/>
@@ -6776,7 +6788,7 @@
           <a:p>
             <a:fld id="{5BCAD085-E8A6-8845-BD4E-CB4CCA059FC4}" type="datetimeFigureOut">
               <a:rPr lang="en-US" smtClean="0"/>
-              <a:t>3/17/2026</a:t>
+              <a:t>5/20/2026</a:t>
             </a:fld>
             <a:endParaRPr lang="en-US"/>
           </a:p>
@@ -6983,7 +6995,7 @@
           <a:p>
             <a:fld id="{5BCAD085-E8A6-8845-BD4E-CB4CCA059FC4}" type="datetimeFigureOut">
               <a:rPr lang="en-US" smtClean="0"/>
-              <a:t>3/17/2026</a:t>
+              <a:t>5/20/2026</a:t>
             </a:fld>
             <a:endParaRPr lang="en-US"/>
           </a:p>
@@ -7163,7 +7175,7 @@
           <a:p>
             <a:fld id="{5BCAD085-E8A6-8845-BD4E-CB4CCA059FC4}" type="datetimeFigureOut">
               <a:rPr lang="en-US" smtClean="0"/>
-              <a:t>3/17/2026</a:t>
+              <a:t>5/20/2026</a:t>
             </a:fld>
             <a:endParaRPr lang="en-US"/>
           </a:p>
@@ -7368,7 +7380,7 @@
           <a:p>
             <a:fld id="{5BCAD085-E8A6-8845-BD4E-CB4CCA059FC4}" type="datetimeFigureOut">
               <a:rPr lang="en-US" smtClean="0"/>
-              <a:t>3/17/2026</a:t>
+              <a:t>5/20/2026</a:t>
             </a:fld>
             <a:endParaRPr lang="en-US"/>
           </a:p>
@@ -14106,7 +14118,7 @@
           <a:p>
             <a:fld id="{5BCAD085-E8A6-8845-BD4E-CB4CCA059FC4}" type="datetimeFigureOut">
               <a:rPr lang="en-US" smtClean="0"/>
-              <a:t>3/17/2026</a:t>
+              <a:t>5/20/2026</a:t>
             </a:fld>
             <a:endParaRPr lang="en-US"/>
           </a:p>
@@ -14380,7 +14392,7 @@
           <a:p>
             <a:fld id="{5BCAD085-E8A6-8845-BD4E-CB4CCA059FC4}" type="datetimeFigureOut">
               <a:rPr lang="en-US" smtClean="0"/>
-              <a:t>3/17/2026</a:t>
+              <a:t>5/20/2026</a:t>
             </a:fld>
             <a:endParaRPr lang="en-US"/>
           </a:p>
@@ -14783,7 +14795,7 @@
           <a:p>
             <a:fld id="{5BCAD085-E8A6-8845-BD4E-CB4CCA059FC4}" type="datetimeFigureOut">
               <a:rPr lang="en-US" smtClean="0"/>
-              <a:t>3/17/2026</a:t>
+              <a:t>5/20/2026</a:t>
             </a:fld>
             <a:endParaRPr lang="en-US"/>
           </a:p>
@@ -14901,7 +14913,7 @@
           <a:p>
             <a:fld id="{5BCAD085-E8A6-8845-BD4E-CB4CCA059FC4}" type="datetimeFigureOut">
               <a:rPr lang="en-US" smtClean="0"/>
-              <a:t>3/17/2026</a:t>
+              <a:t>5/20/2026</a:t>
             </a:fld>
             <a:endParaRPr lang="en-US"/>
           </a:p>
@@ -14996,7 +15008,7 @@
           <a:p>
             <a:fld id="{5BCAD085-E8A6-8845-BD4E-CB4CCA059FC4}" type="datetimeFigureOut">
               <a:rPr lang="en-US" smtClean="0"/>
-              <a:t>3/17/2026</a:t>
+              <a:t>5/20/2026</a:t>
             </a:fld>
             <a:endParaRPr lang="en-US"/>
           </a:p>
@@ -15288,7 +15300,7 @@
           <a:p>
             <a:fld id="{5BCAD085-E8A6-8845-BD4E-CB4CCA059FC4}" type="datetimeFigureOut">
               <a:rPr lang="en-US" smtClean="0"/>
-              <a:t>3/17/2026</a:t>
+              <a:t>5/20/2026</a:t>
             </a:fld>
             <a:endParaRPr lang="en-US"/>
           </a:p>
@@ -15568,7 +15580,7 @@
           <a:p>
             <a:fld id="{5BCAD085-E8A6-8845-BD4E-CB4CCA059FC4}" type="datetimeFigureOut">
               <a:rPr lang="en-US" smtClean="0"/>
-              <a:t>3/17/2026</a:t>
+              <a:t>5/20/2026</a:t>
             </a:fld>
             <a:endParaRPr lang="en-US"/>
           </a:p>
@@ -15818,7 +15830,7 @@
           <a:p>
             <a:fld id="{5BCAD085-E8A6-8845-BD4E-CB4CCA059FC4}" type="datetimeFigureOut">
               <a:rPr lang="en-US" smtClean="0"/>
-              <a:t>3/17/2026</a:t>
+              <a:t>5/20/2026</a:t>
             </a:fld>
             <a:endParaRPr lang="en-US"/>
           </a:p>
@@ -16505,12 +16517,37 @@
           <a:lstStyle/>
           <a:p>
             <a:r>
-              <a:t>Overview of Classes, Abstraction, Encapsulation</a:t>
+              <a:t>What is Object-Oriented Programming?</a:t>
+            </a:r>
+          </a:p>
+          <a:p>
+            <a:r>
+              <a:t>Model real-world entities as objects</a:t>
+            </a:r>
+          </a:p>
+          <a:p>
+            <a:r>
+              <a:t>Four pillars: Abstraction, Encapsulation, Inheritance, Polymorphism</a:t>
+            </a:r>
+          </a:p>
+          <a:p>
+            <a:r>
+              <a:t>This module: classes, objects, constructors, properties</a:t>
+            </a:r>
+          </a:p>
+          <a:p>
+            <a:r>
+              <a:t>Includes hands-on labs every few slides</a:t>
             </a:r>
           </a:p>
         </p:txBody>
       </p:sp>
     </p:spTree>
+    <p:extLst>
+      <p:ext uri="{BB962C8B-B14F-4D97-AF65-F5344CB8AC3E}">
+        <p14:creationId xmlns:p14="http://schemas.microsoft.com/office/powerpoint/2010/main" val="2272939323"/>
+      </p:ext>
+    </p:extLst>
   </p:cSld>
   <p:clrMapOvr>
     <a:masterClrMapping/>
@@ -16643,7 +16680,7 @@
           <a:lstStyle/>
           <a:p>
             <a:r>
-              <a:t>Module 5: Inheritance</a:t>
+              <a:t>Encapsulation</a:t>
             </a:r>
           </a:p>
         </p:txBody>
@@ -16664,17 +16701,88 @@
           <a:lstStyle/>
           <a:p>
             <a:r>
-              <a:t>Reusability of code</a:t>
-            </a:r>
-          </a:p>
-          <a:p>
-            <a:r>
-              <a:t>Base and Derived classes</a:t>
+              <a:t>Bundle data and the methods that operate on it</a:t>
+            </a:r>
+          </a:p>
+          <a:p>
+            <a:r>
+              <a:t>Keep fields private; expose them via public properties or methods</a:t>
+            </a:r>
+          </a:p>
+          <a:p>
+            <a:r>
+              <a:t>Validate inside setters to enforce invariants</a:t>
+            </a:r>
+          </a:p>
+          <a:p>
+            <a:pPr>
+              <a:buNone/>
+            </a:pPr>
+            <a:endParaRPr lang="en-US"/>
+          </a:p>
+          <a:p>
+            <a:pPr>
+              <a:buNone/>
+            </a:pPr>
+            <a:r>
+              <a:rPr lang="en-US" sz="1600" dirty="0">
+                <a:latin typeface="Consolas"/>
+              </a:rPr>
+              <a:t>private int age;</a:t>
+            </a:r>
+          </a:p>
+          <a:p>
+            <a:pPr>
+              <a:buNone/>
+            </a:pPr>
+            <a:r>
+              <a:rPr lang="en-US" sz="1600" dirty="0">
+                <a:latin typeface="Consolas"/>
+              </a:rPr>
+              <a:t>public int Age {</a:t>
+            </a:r>
+          </a:p>
+          <a:p>
+            <a:pPr>
+              <a:buNone/>
+            </a:pPr>
+            <a:r>
+              <a:rPr lang="en-US" sz="1600" dirty="0">
+                <a:latin typeface="Consolas"/>
+              </a:rPr>
+              <a:t>    get =&gt; age;</a:t>
+            </a:r>
+          </a:p>
+          <a:p>
+            <a:pPr>
+              <a:buNone/>
+            </a:pPr>
+            <a:r>
+              <a:rPr lang="en-US" sz="1600" dirty="0">
+                <a:latin typeface="Consolas"/>
+              </a:rPr>
+              <a:t>    set =&gt; age = value &gt;= 0 ? value : 0;</a:t>
+            </a:r>
+          </a:p>
+          <a:p>
+            <a:pPr>
+              <a:buNone/>
+            </a:pPr>
+            <a:r>
+              <a:rPr lang="en-US" sz="1600" dirty="0">
+                <a:latin typeface="Consolas"/>
+              </a:rPr>
+              <a:t>}</a:t>
             </a:r>
           </a:p>
         </p:txBody>
       </p:sp>
     </p:spTree>
+    <p:extLst>
+      <p:ext uri="{BB962C8B-B14F-4D97-AF65-F5344CB8AC3E}">
+        <p14:creationId xmlns:p14="http://schemas.microsoft.com/office/powerpoint/2010/main" val="3033333802"/>
+      </p:ext>
+    </p:extLst>
   </p:cSld>
   <p:clrMapOvr>
     <a:masterClrMapping/>
@@ -16701,7 +16809,13 @@
       </p:grpSpPr>
       <p:sp>
         <p:nvSpPr>
-          <p:cNvPr id="2" name="Title 1"/>
+          <p:cNvPr id="2" name="Title 1">
+            <a:extLst>
+              <a:ext uri="{FF2B5EF4-FFF2-40B4-BE49-F238E27FC236}">
+                <a16:creationId xmlns:a16="http://schemas.microsoft.com/office/drawing/2014/main" id="{FD783C5B-209B-A8AF-1874-FBA38B373BB5}"/>
+              </a:ext>
+            </a:extLst>
+          </p:cNvPr>
           <p:cNvSpPr>
             <a:spLocks noGrp="1"/>
           </p:cNvSpPr>
@@ -16715,14 +16829,21 @@
           <a:lstStyle/>
           <a:p>
             <a:r>
-              <a:t>Inheritance in C#</a:t>
+              <a:rPr lang="en-IN" dirty="0"/>
+              <a:t>Lab 4.2 - Bank Account</a:t>
             </a:r>
           </a:p>
         </p:txBody>
       </p:sp>
       <p:sp>
         <p:nvSpPr>
-          <p:cNvPr id="3" name="Content Placeholder 2"/>
+          <p:cNvPr id="3" name="Content Placeholder 2">
+            <a:extLst>
+              <a:ext uri="{FF2B5EF4-FFF2-40B4-BE49-F238E27FC236}">
+                <a16:creationId xmlns:a16="http://schemas.microsoft.com/office/drawing/2014/main" id="{7DF8CFFB-F2BB-20C1-E3A9-DF38E489F256}"/>
+              </a:ext>
+            </a:extLst>
+          </p:cNvPr>
           <p:cNvSpPr>
             <a:spLocks noGrp="1"/>
           </p:cNvSpPr>
@@ -16736,12 +16857,61 @@
           <a:lstStyle/>
           <a:p>
             <a:r>
-              <a:t>class Child : Parent {}</a:t>
+              <a:rPr lang="en-US" b="1" dirty="0"/>
+              <a:t>Goal:</a:t>
+            </a:r>
+            <a:r>
+              <a:t> practise encapsulation and validation</a:t>
+            </a:r>
+          </a:p>
+          <a:p>
+            <a:r>
+              <a:rPr lang="en-US" b="1" dirty="0"/>
+              <a:t>Steps:</a:t>
+            </a:r>
+          </a:p>
+          <a:p>
+            <a:r>
+              <a:t>1. Create a BankAccount class with a private balance field</a:t>
+            </a:r>
+          </a:p>
+          <a:p>
+            <a:r>
+              <a:t>2. Expose Balance as a read-only public property</a:t>
+            </a:r>
+          </a:p>
+          <a:p>
+            <a:r>
+              <a:t>3. Add Deposit(amount) and Withdraw(amount) methods</a:t>
+            </a:r>
+          </a:p>
+          <a:p>
+            <a:r>
+              <a:t>4. Reject negative deposits and overdrafts</a:t>
+            </a:r>
+          </a:p>
+          <a:p>
+            <a:r>
+              <a:t>5. Add a constructor that takes an opening balance</a:t>
+            </a:r>
+          </a:p>
+          <a:p>
+            <a:r>
+              <a:rPr lang="en-US" b="1" dirty="0"/>
+              <a:t>Stretch:</a:t>
+            </a:r>
+            <a:r>
+              <a:t> log every transaction to a private List</a:t>
             </a:r>
           </a:p>
         </p:txBody>
       </p:sp>
     </p:spTree>
+    <p:extLst>
+      <p:ext uri="{BB962C8B-B14F-4D97-AF65-F5344CB8AC3E}">
+        <p14:creationId xmlns:p14="http://schemas.microsoft.com/office/powerpoint/2010/main" val="3231794635"/>
+      </p:ext>
+    </p:extLst>
   </p:cSld>
   <p:clrMapOvr>
     <a:masterClrMapping/>
@@ -16782,7 +16952,7 @@
           <a:lstStyle/>
           <a:p>
             <a:r>
-              <a:t>Types of Inheritance</a:t>
+              <a:t>Properties in C#</a:t>
             </a:r>
           </a:p>
         </p:txBody>
@@ -16803,17 +16973,66 @@
           <a:lstStyle/>
           <a:p>
             <a:r>
-              <a:t>Single, Multilevel, Hierarchical</a:t>
-            </a:r>
-          </a:p>
-          <a:p>
-            <a:r>
-              <a:t>(No multiple via classes)</a:t>
+              <a:t>Properties look like fields but act like methods</a:t>
+            </a:r>
+          </a:p>
+          <a:p>
+            <a:r>
+              <a:t>Auto-properties: compiler generates the backing field</a:t>
+            </a:r>
+          </a:p>
+          <a:p>
+            <a:r>
+              <a:t>Can be read-only, write-only, or have private setters</a:t>
+            </a:r>
+          </a:p>
+          <a:p>
+            <a:pPr>
+              <a:buNone/>
+            </a:pPr>
+            <a:endParaRPr lang="en-US"/>
+          </a:p>
+          <a:p>
+            <a:pPr>
+              <a:buNone/>
+            </a:pPr>
+            <a:r>
+              <a:rPr lang="en-US" sz="1600" dirty="0">
+                <a:latin typeface="Consolas"/>
+              </a:rPr>
+              <a:t>public string Name { get; set; }</a:t>
+            </a:r>
+          </a:p>
+          <a:p>
+            <a:pPr>
+              <a:buNone/>
+            </a:pPr>
+            <a:r>
+              <a:rPr lang="en-US" sz="1600" dirty="0">
+                <a:latin typeface="Consolas"/>
+              </a:rPr>
+              <a:t>public int Id { get; private set; }</a:t>
+            </a:r>
+          </a:p>
+          <a:p>
+            <a:pPr>
+              <a:buNone/>
+            </a:pPr>
+            <a:r>
+              <a:rPr lang="en-US" sz="1600" dirty="0">
+                <a:latin typeface="Consolas"/>
+              </a:rPr>
+              <a:t>public string Role { get; } = "User";</a:t>
             </a:r>
           </a:p>
         </p:txBody>
       </p:sp>
     </p:spTree>
+    <p:extLst>
+      <p:ext uri="{BB962C8B-B14F-4D97-AF65-F5344CB8AC3E}">
+        <p14:creationId xmlns:p14="http://schemas.microsoft.com/office/powerpoint/2010/main" val="1578988741"/>
+      </p:ext>
+    </p:extLst>
   </p:cSld>
   <p:clrMapOvr>
     <a:masterClrMapping/>
@@ -16840,7 +17059,13 @@
       </p:grpSpPr>
       <p:sp>
         <p:nvSpPr>
-          <p:cNvPr id="2" name="Title 1"/>
+          <p:cNvPr id="2" name="Title 1">
+            <a:extLst>
+              <a:ext uri="{FF2B5EF4-FFF2-40B4-BE49-F238E27FC236}">
+                <a16:creationId xmlns:a16="http://schemas.microsoft.com/office/drawing/2014/main" id="{352B3425-EFFD-5220-9C3B-E9431E5BE7D0}"/>
+              </a:ext>
+            </a:extLst>
+          </p:cNvPr>
           <p:cNvSpPr>
             <a:spLocks noGrp="1"/>
           </p:cNvSpPr>
@@ -16854,14 +17079,21 @@
           <a:lstStyle/>
           <a:p>
             <a:r>
-              <a:t>Constructor Execution</a:t>
+              <a:rPr lang="en-IN"/>
+              <a:t>Static Members</a:t>
             </a:r>
           </a:p>
         </p:txBody>
       </p:sp>
       <p:sp>
         <p:nvSpPr>
-          <p:cNvPr id="3" name="Content Placeholder 2"/>
+          <p:cNvPr id="3" name="Content Placeholder 2">
+            <a:extLst>
+              <a:ext uri="{FF2B5EF4-FFF2-40B4-BE49-F238E27FC236}">
+                <a16:creationId xmlns:a16="http://schemas.microsoft.com/office/drawing/2014/main" id="{5987B0E0-FDFF-ED89-AE87-AC0027D30D4F}"/>
+              </a:ext>
+            </a:extLst>
+          </p:cNvPr>
           <p:cNvSpPr>
             <a:spLocks noGrp="1"/>
           </p:cNvSpPr>
@@ -16875,17 +17107,24 @@
           <a:lstStyle/>
           <a:p>
             <a:r>
-              <a:t>Base constructor runs first</a:t>
-            </a:r>
-          </a:p>
-          <a:p>
-            <a:r>
-              <a:t>Then derived</a:t>
-            </a:r>
+              <a:rPr lang="en-US"/>
+              <a:t>Belong to the class itself, not to any instance
+Shared across all objects of that class
+Accessed via ClassName.Member, not instance.Member
+Common uses: counters, utility methods, constants
+A static class can only contain static members (e.g. Math, Console)
+Cannot use 'this' inside static methods</a:t>
+            </a:r>
+            <a:endParaRPr lang="en-IN"/>
           </a:p>
         </p:txBody>
       </p:sp>
     </p:spTree>
+    <p:extLst>
+      <p:ext uri="{BB962C8B-B14F-4D97-AF65-F5344CB8AC3E}">
+        <p14:creationId xmlns:p14="http://schemas.microsoft.com/office/powerpoint/2010/main" val="526180551"/>
+      </p:ext>
+    </p:extLst>
   </p:cSld>
   <p:clrMapOvr>
     <a:masterClrMapping/>
@@ -16926,7 +17165,8 @@
           <a:lstStyle/>
           <a:p>
             <a:r>
-              <a:t>Hands-On Lab (Module 5)</a:t>
+              <a:rPr lang="en-US" dirty="0"/>
+              <a:t>Lab 4.3 - Student Class</a:t>
             </a:r>
           </a:p>
         </p:txBody>
@@ -16947,17 +17187,61 @@
           <a:lstStyle/>
           <a:p>
             <a:r>
-              <a:t>Create base Employee</a:t>
-            </a:r>
-          </a:p>
-          <a:p>
-            <a:r>
-              <a:t>Derive Manager &amp; Developer</a:t>
+              <a:rPr lang="en-US" b="1" dirty="0"/>
+              <a:t>Goal:</a:t>
+            </a:r>
+            <a:r>
+              <a:t> Apply classes, properties, and constructors</a:t>
+            </a:r>
+          </a:p>
+          <a:p>
+            <a:r>
+              <a:rPr lang="en-US" b="1" dirty="0"/>
+              <a:t>Steps:</a:t>
+            </a:r>
+          </a:p>
+          <a:p>
+            <a:r>
+              <a:t>1. Create a Student class with Id, Name, and Grade properties</a:t>
+            </a:r>
+          </a:p>
+          <a:p>
+            <a:r>
+              <a:t>2. Add a constructor that accepts all three values</a:t>
+            </a:r>
+          </a:p>
+          <a:p>
+            <a:r>
+              <a:t>3. Make Grade validated — reject values outside 0–100</a:t>
+            </a:r>
+          </a:p>
+          <a:p>
+            <a:r>
+              <a:t>4. Add a Display() method that prints student info</a:t>
+            </a:r>
+          </a:p>
+          <a:p>
+            <a:r>
+              <a:t>5. Create two Student objects in Main() and call Display()</a:t>
+            </a:r>
+          </a:p>
+          <a:p>
+            <a:r>
+              <a:rPr lang="en-US" b="1" dirty="0"/>
+              <a:t>Stretch:</a:t>
+            </a:r>
+            <a:r>
+              <a:t> add a static counter that tracks total students created</a:t>
             </a:r>
           </a:p>
         </p:txBody>
       </p:sp>
     </p:spTree>
+    <p:extLst>
+      <p:ext uri="{BB962C8B-B14F-4D97-AF65-F5344CB8AC3E}">
+        <p14:creationId xmlns:p14="http://schemas.microsoft.com/office/powerpoint/2010/main" val="287621387"/>
+      </p:ext>
+    </p:extLst>
   </p:cSld>
   <p:clrMapOvr>
     <a:masterClrMapping/>
@@ -16998,7 +17282,7 @@
           <a:lstStyle/>
           <a:p>
             <a:r>
-              <a:t>Module 6: Polymorphism</a:t>
+              <a:t>Module 5: Inheritance</a:t>
             </a:r>
           </a:p>
         </p:txBody>
@@ -17019,12 +17303,52 @@
           <a:lstStyle/>
           <a:p>
             <a:r>
-              <a:t>One interface, multiple implementations</a:t>
+              <a:rPr lang="en-US" b="1" dirty="0"/>
+              <a:t>What you will learn</a:t>
+            </a:r>
+          </a:p>
+          <a:p>
+            <a:r>
+              <a:t>How one class can reuse another via inheritance</a:t>
+            </a:r>
+          </a:p>
+          <a:p>
+            <a:r>
+              <a:t>The base / derived class relationship and the : syntax</a:t>
+            </a:r>
+          </a:p>
+          <a:p>
+            <a:r>
+              <a:t>Single, multilevel, hierarchical, and multiple inheritance (interfaces)</a:t>
+            </a:r>
+          </a:p>
+          <a:p>
+            <a:r>
+              <a:t>How constructors run from base to derived</a:t>
+            </a:r>
+          </a:p>
+          <a:p>
+            <a:r>
+              <a:t>Using base() to call the parent constructor</a:t>
+            </a:r>
+          </a:p>
+          <a:p>
+            <a:r>
+              <a:rPr lang="en-US" b="1" dirty="0"/>
+              <a:t>Why it matters:</a:t>
+            </a:r>
+            <a:r>
+              <a:t> inheritance is how C# expresses an "is-a" relationship and keeps shared behaviour DRY.</a:t>
             </a:r>
           </a:p>
         </p:txBody>
       </p:sp>
     </p:spTree>
+    <p:extLst>
+      <p:ext uri="{BB962C8B-B14F-4D97-AF65-F5344CB8AC3E}">
+        <p14:creationId xmlns:p14="http://schemas.microsoft.com/office/powerpoint/2010/main" val="2998771946"/>
+      </p:ext>
+    </p:extLst>
   </p:cSld>
   <p:clrMapOvr>
     <a:masterClrMapping/>
@@ -17065,7 +17389,7 @@
           <a:lstStyle/>
           <a:p>
             <a:r>
-              <a:t>Types of Polymorphism</a:t>
+              <a:t>Inheritance in C#</a:t>
             </a:r>
           </a:p>
         </p:txBody>
@@ -17086,17 +17410,76 @@
           <a:lstStyle/>
           <a:p>
             <a:r>
-              <a:t>Static (Compile-time)</a:t>
-            </a:r>
-          </a:p>
-          <a:p>
-            <a:r>
-              <a:t>Dynamic (Runtime)</a:t>
+              <a:t>A derived class inherits members of a base class</a:t>
+            </a:r>
+          </a:p>
+          <a:p>
+            <a:r>
+              <a:t>Syntax: </a:t>
+            </a:r>
+            <a:r>
+              <a:rPr lang="en-US" dirty="0">
+                <a:latin typeface="Consolas"/>
+              </a:rPr>
+              <a:t>class Derived : Base</a:t>
+            </a:r>
+          </a:p>
+          <a:p>
+            <a:r>
+              <a:t>Reuses fields, properties, and methods — no need to rewrite them</a:t>
+            </a:r>
+          </a:p>
+          <a:p>
+            <a:r>
+              <a:t>C# classes inherit from a single base class only (no multiple inheritance)</a:t>
+            </a:r>
+          </a:p>
+          <a:p>
+            <a:r>
+              <a:t>Every class implicitly inherits from System.Object</a:t>
+            </a:r>
+          </a:p>
+          <a:p>
+            <a:pPr>
+              <a:buNone/>
+            </a:pPr>
+            <a:r>
+              <a:rPr lang="en-US" sz="1400" dirty="0">
+                <a:latin typeface="Consolas"/>
+              </a:rPr>
+              <a:t>class Animal { public void Eat() { } }</a:t>
+            </a:r>
+          </a:p>
+          <a:p>
+            <a:pPr>
+              <a:buNone/>
+            </a:pPr>
+            <a:r>
+              <a:rPr lang="en-US" sz="1400" dirty="0">
+                <a:latin typeface="Consolas"/>
+              </a:rPr>
+              <a:t>class Dog : Animal { public void Bark() { } }</a:t>
+            </a:r>
+          </a:p>
+          <a:p>
+            <a:pPr>
+              <a:buNone/>
+            </a:pPr>
+            <a:r>
+              <a:rPr lang="en-US" sz="1400" dirty="0">
+                <a:latin typeface="Consolas"/>
+              </a:rPr>
+              <a:t>Dog d = new(); d.Eat(); d.Bark();</a:t>
             </a:r>
           </a:p>
         </p:txBody>
       </p:sp>
     </p:spTree>
+    <p:extLst>
+      <p:ext uri="{BB962C8B-B14F-4D97-AF65-F5344CB8AC3E}">
+        <p14:creationId xmlns:p14="http://schemas.microsoft.com/office/powerpoint/2010/main" val="1369362801"/>
+      </p:ext>
+    </p:extLst>
   </p:cSld>
   <p:clrMapOvr>
     <a:masterClrMapping/>
@@ -17123,7 +17506,13 @@
       </p:grpSpPr>
       <p:sp>
         <p:nvSpPr>
-          <p:cNvPr id="2" name="Title 1"/>
+          <p:cNvPr id="2" name="Title 1">
+            <a:extLst>
+              <a:ext uri="{FF2B5EF4-FFF2-40B4-BE49-F238E27FC236}">
+                <a16:creationId xmlns:a16="http://schemas.microsoft.com/office/drawing/2014/main" id="{176C4EB9-ACE7-1E5F-7AA9-DE09CEA0D652}"/>
+              </a:ext>
+            </a:extLst>
+          </p:cNvPr>
           <p:cNvSpPr>
             <a:spLocks noGrp="1"/>
           </p:cNvSpPr>
@@ -17137,38 +17526,683 @@
           <a:lstStyle/>
           <a:p>
             <a:r>
-              <a:t>Method Overloading</a:t>
+              <a:rPr lang="en-IN"/>
+              <a:t>Inheritance Diagram</a:t>
             </a:r>
           </a:p>
         </p:txBody>
       </p:sp>
       <p:sp>
         <p:nvSpPr>
-          <p:cNvPr id="3" name="Content Placeholder 2"/>
-          <p:cNvSpPr>
-            <a:spLocks noGrp="1"/>
-          </p:cNvSpPr>
-          <p:nvPr>
-            <p:ph idx="1"/>
-          </p:nvPr>
+          <p:cNvPr id="3" name="Rectangle 2">
+            <a:extLst>
+              <a:ext uri="{FF2B5EF4-FFF2-40B4-BE49-F238E27FC236}">
+                <a16:creationId xmlns:a16="http://schemas.microsoft.com/office/drawing/2014/main" id="{0729DE98-A440-423A-80D1-9627077C6F8D}"/>
+              </a:ext>
+            </a:extLst>
+          </p:cNvPr>
+          <p:cNvSpPr/>
+          <p:nvPr/>
         </p:nvSpPr>
-        <p:spPr/>
+        <p:spPr>
+          <a:xfrm>
+            <a:off x="3810000" y="2286000"/>
+            <a:ext cx="1524000" cy="508000"/>
+          </a:xfrm>
+          <a:prstGeom prst="rect">
+            <a:avLst/>
+          </a:prstGeom>
+          <a:solidFill>
+            <a:srgbClr val="1A6E96"/>
+          </a:solidFill>
+          <a:ln w="15875" cap="flat" cmpd="sng" algn="ctr">
+            <a:noFill/>
+            <a:prstDash val="solid"/>
+          </a:ln>
+        </p:spPr>
+        <p:style>
+          <a:lnRef idx="2">
+            <a:schemeClr val="accent1">
+              <a:shade val="15000"/>
+            </a:schemeClr>
+          </a:lnRef>
+          <a:fillRef idx="1">
+            <a:schemeClr val="accent1"/>
+          </a:fillRef>
+          <a:effectRef idx="0">
+            <a:schemeClr val="accent1"/>
+          </a:effectRef>
+          <a:fontRef idx="minor">
+            <a:schemeClr val="lt1"/>
+          </a:fontRef>
+        </p:style>
         <p:txBody>
-          <a:bodyPr/>
+          <a:bodyPr vertOverflow="clip" horzOverflow="clip" wrap="none" rtlCol="0" anchor="ctr" anchorCtr="0">
+            <a:noAutofit/>
+          </a:bodyPr>
           <a:lstStyle/>
           <a:p>
-            <a:r>
-              <a:t>Same method name</a:t>
-            </a:r>
-          </a:p>
-          <a:p>
-            <a:r>
-              <a:t>Different parameters</a:t>
-            </a:r>
+            <a:pPr algn="l"/>
+            <a:r>
+              <a:rPr lang="en-IN" sz="1400" b="1">
+                <a:solidFill>
+                  <a:srgbClr val="FFFFFF"/>
+                </a:solidFill>
+              </a:rPr>
+              <a:t>Animal</a:t>
+            </a:r>
+          </a:p>
+        </p:txBody>
+      </p:sp>
+      <p:sp>
+        <p:nvSpPr>
+          <p:cNvPr id="4" name="Rectangle 3">
+            <a:extLst>
+              <a:ext uri="{FF2B5EF4-FFF2-40B4-BE49-F238E27FC236}">
+                <a16:creationId xmlns:a16="http://schemas.microsoft.com/office/drawing/2014/main" id="{B03A1630-A58D-4E6A-996B-B1FBA7E67D3B}"/>
+              </a:ext>
+            </a:extLst>
+          </p:cNvPr>
+          <p:cNvSpPr/>
+          <p:nvPr/>
+        </p:nvSpPr>
+        <p:spPr>
+          <a:xfrm>
+            <a:off x="1397000" y="3683000"/>
+            <a:ext cx="1524000" cy="508000"/>
+          </a:xfrm>
+          <a:prstGeom prst="rect">
+            <a:avLst/>
+          </a:prstGeom>
+          <a:solidFill>
+            <a:srgbClr val="1A6E96"/>
+          </a:solidFill>
+          <a:ln w="15875" cap="flat" cmpd="sng" algn="ctr">
+            <a:noFill/>
+            <a:prstDash val="solid"/>
+          </a:ln>
+        </p:spPr>
+        <p:style>
+          <a:lnRef idx="2">
+            <a:schemeClr val="accent1">
+              <a:shade val="15000"/>
+            </a:schemeClr>
+          </a:lnRef>
+          <a:fillRef idx="1">
+            <a:schemeClr val="accent1"/>
+          </a:fillRef>
+          <a:effectRef idx="0">
+            <a:schemeClr val="accent1"/>
+          </a:effectRef>
+          <a:fontRef idx="minor">
+            <a:schemeClr val="lt1"/>
+          </a:fontRef>
+        </p:style>
+        <p:txBody>
+          <a:bodyPr vertOverflow="clip" horzOverflow="clip" wrap="none" rtlCol="0" anchor="ctr" anchorCtr="0">
+            <a:noAutofit/>
+          </a:bodyPr>
+          <a:lstStyle/>
+          <a:p>
+            <a:pPr algn="l"/>
+            <a:r>
+              <a:rPr lang="en-IN" sz="1400" b="1">
+                <a:solidFill>
+                  <a:srgbClr val="FFFFFF"/>
+                </a:solidFill>
+              </a:rPr>
+              <a:t>Dog</a:t>
+            </a:r>
+          </a:p>
+        </p:txBody>
+      </p:sp>
+      <p:sp>
+        <p:nvSpPr>
+          <p:cNvPr id="5" name="Rectangle 4">
+            <a:extLst>
+              <a:ext uri="{FF2B5EF4-FFF2-40B4-BE49-F238E27FC236}">
+                <a16:creationId xmlns:a16="http://schemas.microsoft.com/office/drawing/2014/main" id="{CEA28D02-59AB-410B-B40D-6CA3499705E1}"/>
+              </a:ext>
+            </a:extLst>
+          </p:cNvPr>
+          <p:cNvSpPr/>
+          <p:nvPr/>
+        </p:nvSpPr>
+        <p:spPr>
+          <a:xfrm>
+            <a:off x="3810000" y="3683000"/>
+            <a:ext cx="1524000" cy="508000"/>
+          </a:xfrm>
+          <a:prstGeom prst="rect">
+            <a:avLst/>
+          </a:prstGeom>
+          <a:solidFill>
+            <a:srgbClr val="1A6E96"/>
+          </a:solidFill>
+          <a:ln w="15875" cap="flat" cmpd="sng" algn="ctr">
+            <a:noFill/>
+            <a:prstDash val="solid"/>
+          </a:ln>
+        </p:spPr>
+        <p:style>
+          <a:lnRef idx="2">
+            <a:schemeClr val="accent1">
+              <a:shade val="15000"/>
+            </a:schemeClr>
+          </a:lnRef>
+          <a:fillRef idx="1">
+            <a:schemeClr val="accent1"/>
+          </a:fillRef>
+          <a:effectRef idx="0">
+            <a:schemeClr val="accent1"/>
+          </a:effectRef>
+          <a:fontRef idx="minor">
+            <a:schemeClr val="lt1"/>
+          </a:fontRef>
+        </p:style>
+        <p:txBody>
+          <a:bodyPr vertOverflow="clip" horzOverflow="clip" wrap="none" rtlCol="0" anchor="ctr" anchorCtr="0">
+            <a:noAutofit/>
+          </a:bodyPr>
+          <a:lstStyle/>
+          <a:p>
+            <a:pPr algn="l"/>
+            <a:r>
+              <a:rPr lang="en-IN" sz="1400" b="1">
+                <a:solidFill>
+                  <a:srgbClr val="FFFFFF"/>
+                </a:solidFill>
+              </a:rPr>
+              <a:t>Cat</a:t>
+            </a:r>
+          </a:p>
+        </p:txBody>
+      </p:sp>
+      <p:sp>
+        <p:nvSpPr>
+          <p:cNvPr id="6" name="Rectangle 5">
+            <a:extLst>
+              <a:ext uri="{FF2B5EF4-FFF2-40B4-BE49-F238E27FC236}">
+                <a16:creationId xmlns:a16="http://schemas.microsoft.com/office/drawing/2014/main" id="{26486E31-E729-45E5-B3F7-E268A5A903FF}"/>
+              </a:ext>
+            </a:extLst>
+          </p:cNvPr>
+          <p:cNvSpPr/>
+          <p:nvPr/>
+        </p:nvSpPr>
+        <p:spPr>
+          <a:xfrm>
+            <a:off x="6223000" y="3683000"/>
+            <a:ext cx="1524000" cy="508000"/>
+          </a:xfrm>
+          <a:prstGeom prst="rect">
+            <a:avLst/>
+          </a:prstGeom>
+          <a:solidFill>
+            <a:srgbClr val="1A6E96"/>
+          </a:solidFill>
+          <a:ln w="15875" cap="flat" cmpd="sng" algn="ctr">
+            <a:noFill/>
+            <a:prstDash val="solid"/>
+          </a:ln>
+        </p:spPr>
+        <p:style>
+          <a:lnRef idx="2">
+            <a:schemeClr val="accent1">
+              <a:shade val="15000"/>
+            </a:schemeClr>
+          </a:lnRef>
+          <a:fillRef idx="1">
+            <a:schemeClr val="accent1"/>
+          </a:fillRef>
+          <a:effectRef idx="0">
+            <a:schemeClr val="accent1"/>
+          </a:effectRef>
+          <a:fontRef idx="minor">
+            <a:schemeClr val="lt1"/>
+          </a:fontRef>
+        </p:style>
+        <p:txBody>
+          <a:bodyPr vertOverflow="clip" horzOverflow="clip" wrap="none" rtlCol="0" anchor="ctr" anchorCtr="0">
+            <a:noAutofit/>
+          </a:bodyPr>
+          <a:lstStyle/>
+          <a:p>
+            <a:pPr algn="l"/>
+            <a:r>
+              <a:rPr lang="en-IN" sz="1400" b="1">
+                <a:solidFill>
+                  <a:srgbClr val="FFFFFF"/>
+                </a:solidFill>
+              </a:rPr>
+              <a:t>Cow</a:t>
+            </a:r>
+          </a:p>
+        </p:txBody>
+      </p:sp>
+      <p:sp>
+        <p:nvSpPr>
+          <p:cNvPr id="7" name="Rectangle 6">
+            <a:extLst>
+              <a:ext uri="{FF2B5EF4-FFF2-40B4-BE49-F238E27FC236}">
+                <a16:creationId xmlns:a16="http://schemas.microsoft.com/office/drawing/2014/main" id="{2757A75D-A8C5-47A5-B9C3-3B8D123C6607}"/>
+              </a:ext>
+            </a:extLst>
+          </p:cNvPr>
+          <p:cNvSpPr/>
+          <p:nvPr/>
+        </p:nvSpPr>
+        <p:spPr>
+          <a:xfrm>
+            <a:off x="1397000" y="5080000"/>
+            <a:ext cx="1524000" cy="508000"/>
+          </a:xfrm>
+          <a:prstGeom prst="rect">
+            <a:avLst/>
+          </a:prstGeom>
+          <a:solidFill>
+            <a:srgbClr val="6F9C3D"/>
+          </a:solidFill>
+          <a:ln w="15875" cap="flat" cmpd="sng" algn="ctr">
+            <a:noFill/>
+            <a:prstDash val="solid"/>
+          </a:ln>
+        </p:spPr>
+        <p:style>
+          <a:lnRef idx="2">
+            <a:schemeClr val="accent1">
+              <a:shade val="15000"/>
+            </a:schemeClr>
+          </a:lnRef>
+          <a:fillRef idx="1">
+            <a:schemeClr val="accent1"/>
+          </a:fillRef>
+          <a:effectRef idx="0">
+            <a:schemeClr val="accent1"/>
+          </a:effectRef>
+          <a:fontRef idx="minor">
+            <a:schemeClr val="lt1"/>
+          </a:fontRef>
+        </p:style>
+        <p:txBody>
+          <a:bodyPr vertOverflow="clip" horzOverflow="clip" wrap="none" rtlCol="0" anchor="ctr" anchorCtr="0">
+            <a:noAutofit/>
+          </a:bodyPr>
+          <a:lstStyle/>
+          <a:p>
+            <a:pPr algn="l"/>
+            <a:r>
+              <a:rPr lang="en-IN" sz="1400" b="1">
+                <a:solidFill>
+                  <a:srgbClr val="FFFFFF"/>
+                </a:solidFill>
+              </a:rPr>
+              <a:t>Puppy</a:t>
+            </a:r>
+          </a:p>
+        </p:txBody>
+      </p:sp>
+      <p:sp>
+        <p:nvSpPr>
+          <p:cNvPr id="8" name="Rectangle 7">
+            <a:extLst>
+              <a:ext uri="{FF2B5EF4-FFF2-40B4-BE49-F238E27FC236}">
+                <a16:creationId xmlns:a16="http://schemas.microsoft.com/office/drawing/2014/main" id="{A2CFAF9F-FF00-4B58-9836-0445CD624220}"/>
+              </a:ext>
+            </a:extLst>
+          </p:cNvPr>
+          <p:cNvSpPr/>
+          <p:nvPr/>
+        </p:nvSpPr>
+        <p:spPr>
+          <a:xfrm>
+            <a:off x="4572000" y="2794000"/>
+            <a:ext cx="19050" cy="444500"/>
+          </a:xfrm>
+          <a:prstGeom prst="rect">
+            <a:avLst/>
+          </a:prstGeom>
+          <a:solidFill>
+            <a:srgbClr val="888888"/>
+          </a:solidFill>
+          <a:ln w="15875" cap="flat" cmpd="sng" algn="ctr">
+            <a:noFill/>
+            <a:prstDash val="solid"/>
+          </a:ln>
+        </p:spPr>
+        <p:style>
+          <a:lnRef idx="2">
+            <a:schemeClr val="accent1">
+              <a:shade val="15000"/>
+            </a:schemeClr>
+          </a:lnRef>
+          <a:fillRef idx="1">
+            <a:schemeClr val="accent1"/>
+          </a:fillRef>
+          <a:effectRef idx="0">
+            <a:schemeClr val="accent1"/>
+          </a:effectRef>
+          <a:fontRef idx="minor">
+            <a:schemeClr val="lt1"/>
+          </a:fontRef>
+        </p:style>
+        <p:txBody>
+          <a:bodyPr vertOverflow="clip" horzOverflow="clip" rtlCol="0" anchor="t"/>
+          <a:lstStyle/>
+          <a:p>
+            <a:pPr algn="l"/>
+            <a:endParaRPr lang="en-IN"/>
+          </a:p>
+        </p:txBody>
+      </p:sp>
+      <p:sp>
+        <p:nvSpPr>
+          <p:cNvPr id="9" name="Rectangle 8">
+            <a:extLst>
+              <a:ext uri="{FF2B5EF4-FFF2-40B4-BE49-F238E27FC236}">
+                <a16:creationId xmlns:a16="http://schemas.microsoft.com/office/drawing/2014/main" id="{03BB2785-1D2F-4696-807A-826C71CFBBC8}"/>
+              </a:ext>
+            </a:extLst>
+          </p:cNvPr>
+          <p:cNvSpPr/>
+          <p:nvPr/>
+        </p:nvSpPr>
+        <p:spPr>
+          <a:xfrm>
+            <a:off x="2159000" y="3225800"/>
+            <a:ext cx="4838700" cy="19050"/>
+          </a:xfrm>
+          <a:prstGeom prst="rect">
+            <a:avLst/>
+          </a:prstGeom>
+          <a:solidFill>
+            <a:srgbClr val="888888"/>
+          </a:solidFill>
+          <a:ln w="15875" cap="flat" cmpd="sng" algn="ctr">
+            <a:noFill/>
+            <a:prstDash val="solid"/>
+          </a:ln>
+        </p:spPr>
+        <p:style>
+          <a:lnRef idx="2">
+            <a:schemeClr val="accent1">
+              <a:shade val="15000"/>
+            </a:schemeClr>
+          </a:lnRef>
+          <a:fillRef idx="1">
+            <a:schemeClr val="accent1"/>
+          </a:fillRef>
+          <a:effectRef idx="0">
+            <a:schemeClr val="accent1"/>
+          </a:effectRef>
+          <a:fontRef idx="minor">
+            <a:schemeClr val="lt1"/>
+          </a:fontRef>
+        </p:style>
+        <p:txBody>
+          <a:bodyPr vertOverflow="clip" horzOverflow="clip" rtlCol="0" anchor="t"/>
+          <a:lstStyle/>
+          <a:p>
+            <a:pPr algn="l"/>
+            <a:endParaRPr lang="en-IN"/>
+          </a:p>
+        </p:txBody>
+      </p:sp>
+      <p:sp>
+        <p:nvSpPr>
+          <p:cNvPr id="10" name="Rectangle 9">
+            <a:extLst>
+              <a:ext uri="{FF2B5EF4-FFF2-40B4-BE49-F238E27FC236}">
+                <a16:creationId xmlns:a16="http://schemas.microsoft.com/office/drawing/2014/main" id="{8E7EF1AF-C37E-4A9E-80F7-5590D2B731E3}"/>
+              </a:ext>
+            </a:extLst>
+          </p:cNvPr>
+          <p:cNvSpPr/>
+          <p:nvPr/>
+        </p:nvSpPr>
+        <p:spPr>
+          <a:xfrm>
+            <a:off x="2159000" y="3238500"/>
+            <a:ext cx="19050" cy="444500"/>
+          </a:xfrm>
+          <a:prstGeom prst="rect">
+            <a:avLst/>
+          </a:prstGeom>
+          <a:solidFill>
+            <a:srgbClr val="888888"/>
+          </a:solidFill>
+          <a:ln w="15875" cap="flat" cmpd="sng" algn="ctr">
+            <a:noFill/>
+            <a:prstDash val="solid"/>
+          </a:ln>
+        </p:spPr>
+        <p:style>
+          <a:lnRef idx="2">
+            <a:schemeClr val="accent1">
+              <a:shade val="15000"/>
+            </a:schemeClr>
+          </a:lnRef>
+          <a:fillRef idx="1">
+            <a:schemeClr val="accent1"/>
+          </a:fillRef>
+          <a:effectRef idx="0">
+            <a:schemeClr val="accent1"/>
+          </a:effectRef>
+          <a:fontRef idx="minor">
+            <a:schemeClr val="lt1"/>
+          </a:fontRef>
+        </p:style>
+        <p:txBody>
+          <a:bodyPr vertOverflow="clip" horzOverflow="clip" rtlCol="0" anchor="t"/>
+          <a:lstStyle/>
+          <a:p>
+            <a:pPr algn="l"/>
+            <a:endParaRPr lang="en-IN"/>
+          </a:p>
+        </p:txBody>
+      </p:sp>
+      <p:sp>
+        <p:nvSpPr>
+          <p:cNvPr id="11" name="Rectangle 10">
+            <a:extLst>
+              <a:ext uri="{FF2B5EF4-FFF2-40B4-BE49-F238E27FC236}">
+                <a16:creationId xmlns:a16="http://schemas.microsoft.com/office/drawing/2014/main" id="{880F8844-3123-4667-A228-0D8D1D62EDB2}"/>
+              </a:ext>
+            </a:extLst>
+          </p:cNvPr>
+          <p:cNvSpPr/>
+          <p:nvPr/>
+        </p:nvSpPr>
+        <p:spPr>
+          <a:xfrm>
+            <a:off x="4572000" y="3238500"/>
+            <a:ext cx="19050" cy="444500"/>
+          </a:xfrm>
+          <a:prstGeom prst="rect">
+            <a:avLst/>
+          </a:prstGeom>
+          <a:solidFill>
+            <a:srgbClr val="888888"/>
+          </a:solidFill>
+          <a:ln w="15875" cap="flat" cmpd="sng" algn="ctr">
+            <a:noFill/>
+            <a:prstDash val="solid"/>
+          </a:ln>
+        </p:spPr>
+        <p:style>
+          <a:lnRef idx="2">
+            <a:schemeClr val="accent1">
+              <a:shade val="15000"/>
+            </a:schemeClr>
+          </a:lnRef>
+          <a:fillRef idx="1">
+            <a:schemeClr val="accent1"/>
+          </a:fillRef>
+          <a:effectRef idx="0">
+            <a:schemeClr val="accent1"/>
+          </a:effectRef>
+          <a:fontRef idx="minor">
+            <a:schemeClr val="lt1"/>
+          </a:fontRef>
+        </p:style>
+        <p:txBody>
+          <a:bodyPr vertOverflow="clip" horzOverflow="clip" rtlCol="0" anchor="t"/>
+          <a:lstStyle/>
+          <a:p>
+            <a:pPr algn="l"/>
+            <a:endParaRPr lang="en-IN"/>
+          </a:p>
+        </p:txBody>
+      </p:sp>
+      <p:sp>
+        <p:nvSpPr>
+          <p:cNvPr id="12" name="Rectangle 11">
+            <a:extLst>
+              <a:ext uri="{FF2B5EF4-FFF2-40B4-BE49-F238E27FC236}">
+                <a16:creationId xmlns:a16="http://schemas.microsoft.com/office/drawing/2014/main" id="{B109619E-BC70-427F-9904-ACD8A7118FDC}"/>
+              </a:ext>
+            </a:extLst>
+          </p:cNvPr>
+          <p:cNvSpPr/>
+          <p:nvPr/>
+        </p:nvSpPr>
+        <p:spPr>
+          <a:xfrm>
+            <a:off x="6985000" y="3238500"/>
+            <a:ext cx="19050" cy="444500"/>
+          </a:xfrm>
+          <a:prstGeom prst="rect">
+            <a:avLst/>
+          </a:prstGeom>
+          <a:solidFill>
+            <a:srgbClr val="888888"/>
+          </a:solidFill>
+          <a:ln w="15875" cap="flat" cmpd="sng" algn="ctr">
+            <a:noFill/>
+            <a:prstDash val="solid"/>
+          </a:ln>
+        </p:spPr>
+        <p:style>
+          <a:lnRef idx="2">
+            <a:schemeClr val="accent1">
+              <a:shade val="15000"/>
+            </a:schemeClr>
+          </a:lnRef>
+          <a:fillRef idx="1">
+            <a:schemeClr val="accent1"/>
+          </a:fillRef>
+          <a:effectRef idx="0">
+            <a:schemeClr val="accent1"/>
+          </a:effectRef>
+          <a:fontRef idx="minor">
+            <a:schemeClr val="lt1"/>
+          </a:fontRef>
+        </p:style>
+        <p:txBody>
+          <a:bodyPr vertOverflow="clip" horzOverflow="clip" rtlCol="0" anchor="t"/>
+          <a:lstStyle/>
+          <a:p>
+            <a:pPr algn="l"/>
+            <a:endParaRPr lang="en-IN"/>
+          </a:p>
+        </p:txBody>
+      </p:sp>
+      <p:sp>
+        <p:nvSpPr>
+          <p:cNvPr id="13" name="Rectangle 12">
+            <a:extLst>
+              <a:ext uri="{FF2B5EF4-FFF2-40B4-BE49-F238E27FC236}">
+                <a16:creationId xmlns:a16="http://schemas.microsoft.com/office/drawing/2014/main" id="{06683857-BFB0-4B08-9C0C-2CF757359A4A}"/>
+              </a:ext>
+            </a:extLst>
+          </p:cNvPr>
+          <p:cNvSpPr/>
+          <p:nvPr/>
+        </p:nvSpPr>
+        <p:spPr>
+          <a:xfrm>
+            <a:off x="2159000" y="4191000"/>
+            <a:ext cx="19050" cy="889000"/>
+          </a:xfrm>
+          <a:prstGeom prst="rect">
+            <a:avLst/>
+          </a:prstGeom>
+          <a:solidFill>
+            <a:srgbClr val="888888"/>
+          </a:solidFill>
+          <a:ln w="15875" cap="flat" cmpd="sng" algn="ctr">
+            <a:noFill/>
+            <a:prstDash val="solid"/>
+          </a:ln>
+        </p:spPr>
+        <p:style>
+          <a:lnRef idx="2">
+            <a:schemeClr val="accent1">
+              <a:shade val="15000"/>
+            </a:schemeClr>
+          </a:lnRef>
+          <a:fillRef idx="1">
+            <a:schemeClr val="accent1"/>
+          </a:fillRef>
+          <a:effectRef idx="0">
+            <a:schemeClr val="accent1"/>
+          </a:effectRef>
+          <a:fontRef idx="minor">
+            <a:schemeClr val="lt1"/>
+          </a:fontRef>
+        </p:style>
+        <p:txBody>
+          <a:bodyPr vertOverflow="clip" horzOverflow="clip" rtlCol="0" anchor="t"/>
+          <a:lstStyle/>
+          <a:p>
+            <a:pPr algn="l"/>
+            <a:endParaRPr lang="en-IN"/>
+          </a:p>
+        </p:txBody>
+      </p:sp>
+      <p:sp>
+        <p:nvSpPr>
+          <p:cNvPr id="14" name="TextBox 13">
+            <a:extLst>
+              <a:ext uri="{FF2B5EF4-FFF2-40B4-BE49-F238E27FC236}">
+                <a16:creationId xmlns:a16="http://schemas.microsoft.com/office/drawing/2014/main" id="{35DD0B19-6747-4B47-8439-54188DD0D3F9}"/>
+              </a:ext>
+            </a:extLst>
+          </p:cNvPr>
+          <p:cNvSpPr txBox="1"/>
+          <p:nvPr/>
+        </p:nvSpPr>
+        <p:spPr>
+          <a:xfrm>
+            <a:off x="762000" y="5969000"/>
+            <a:ext cx="7620000" cy="381000"/>
+          </a:xfrm>
+          <a:prstGeom prst="rect">
+            <a:avLst/>
+          </a:prstGeom>
+          <a:noFill/>
+        </p:spPr>
+        <p:txBody>
+          <a:bodyPr vertOverflow="overflow" vert="horz" wrap="square" rtlCol="0" anchor="t">
+            <a:spAutoFit/>
+          </a:bodyPr>
+          <a:lstStyle/>
+          <a:p>
+            <a:pPr algn="l"/>
+            <a:r>
+              <a:rPr lang="en-US" sz="1400" i="1"/>
+              <a:t>Hierarchical inheritance (top) + multilevel inheritance (Animal → Dog → Puppy)</a:t>
+            </a:r>
+            <a:endParaRPr lang="en-IN" sz="1400" i="1"/>
           </a:p>
         </p:txBody>
       </p:sp>
     </p:spTree>
+    <p:extLst>
+      <p:ext uri="{BB962C8B-B14F-4D97-AF65-F5344CB8AC3E}">
+        <p14:creationId xmlns:p14="http://schemas.microsoft.com/office/powerpoint/2010/main" val="2989689638"/>
+      </p:ext>
+    </p:extLst>
   </p:cSld>
   <p:clrMapOvr>
     <a:masterClrMapping/>
@@ -17209,7 +18243,7 @@
           <a:lstStyle/>
           <a:p>
             <a:r>
-              <a:t>Operator Overloading</a:t>
+              <a:t>Types of Inheritance</a:t>
             </a:r>
           </a:p>
         </p:txBody>
@@ -17230,12 +18264,62 @@
           <a:lstStyle/>
           <a:p>
             <a:r>
-              <a:t>Custom behavior for operators</a:t>
+              <a:rPr lang="en-US" b="1" dirty="0"/>
+              <a:t>Single:</a:t>
+            </a:r>
+            <a:r>
+              <a:t> one base, one derived  (Animal → Dog)</a:t>
+            </a:r>
+          </a:p>
+          <a:p>
+            <a:r>
+              <a:rPr lang="en-US" b="1" dirty="0"/>
+              <a:t>Multilevel:</a:t>
+            </a:r>
+            <a:r>
+              <a:t> chain of derivation  (Animal → Dog → Puppy)</a:t>
+            </a:r>
+          </a:p>
+          <a:p>
+            <a:r>
+              <a:rPr lang="en-US" b="1" dirty="0"/>
+              <a:t>Hierarchical:</a:t>
+            </a:r>
+            <a:r>
+              <a:t> several derived classes share one base  (Animal → Dog, Cat, Cow)</a:t>
+            </a:r>
+          </a:p>
+          <a:p>
+            <a:r>
+              <a:rPr lang="en-US" b="1" dirty="0"/>
+              <a:t>Multiple (via interfaces only):</a:t>
+            </a:r>
+            <a:r>
+              <a:t> a class implements many interfaces</a:t>
+            </a:r>
+          </a:p>
+          <a:p>
+            <a:r>
+              <a:rPr lang="en-US" b="1" dirty="0"/>
+              <a:t>Hybrid:</a:t>
+            </a:r>
+            <a:r>
+              <a:t> a combination of the above</a:t>
+            </a:r>
+          </a:p>
+          <a:p>
+            <a:r>
+              <a:t>C# forbids multiple class inheritance to avoid the diamond problem — use interfaces instead.</a:t>
             </a:r>
           </a:p>
         </p:txBody>
       </p:sp>
     </p:spTree>
+    <p:extLst>
+      <p:ext uri="{BB962C8B-B14F-4D97-AF65-F5344CB8AC3E}">
+        <p14:creationId xmlns:p14="http://schemas.microsoft.com/office/powerpoint/2010/main" val="240434241"/>
+      </p:ext>
+    </p:extLst>
   </p:cSld>
   <p:clrMapOvr>
     <a:masterClrMapping/>
@@ -17262,7 +18346,13 @@
       </p:grpSpPr>
       <p:sp>
         <p:nvSpPr>
-          <p:cNvPr id="2" name="Title 1"/>
+          <p:cNvPr id="2" name="Title 1">
+            <a:extLst>
+              <a:ext uri="{FF2B5EF4-FFF2-40B4-BE49-F238E27FC236}">
+                <a16:creationId xmlns:a16="http://schemas.microsoft.com/office/drawing/2014/main" id="{A72D5A89-E435-7E70-C571-9F2BA672B99B}"/>
+              </a:ext>
+            </a:extLst>
+          </p:cNvPr>
           <p:cNvSpPr>
             <a:spLocks noGrp="1"/>
           </p:cNvSpPr>
@@ -17276,14 +18366,21 @@
           <a:lstStyle/>
           <a:p>
             <a:r>
-              <a:t>Runtime Polymorphism</a:t>
+              <a:rPr lang="en-IN" dirty="0"/>
+              <a:t>Lab 5.1 - Animal &amp; Dog</a:t>
             </a:r>
           </a:p>
         </p:txBody>
       </p:sp>
       <p:sp>
         <p:nvSpPr>
-          <p:cNvPr id="3" name="Content Placeholder 2"/>
+          <p:cNvPr id="3" name="Content Placeholder 2">
+            <a:extLst>
+              <a:ext uri="{FF2B5EF4-FFF2-40B4-BE49-F238E27FC236}">
+                <a16:creationId xmlns:a16="http://schemas.microsoft.com/office/drawing/2014/main" id="{2C5EEFF3-E775-CD86-6D7F-F59258BC9B68}"/>
+              </a:ext>
+            </a:extLst>
+          </p:cNvPr>
           <p:cNvSpPr>
             <a:spLocks noGrp="1"/>
           </p:cNvSpPr>
@@ -17297,12 +18394,61 @@
           <a:lstStyle/>
           <a:p>
             <a:r>
-              <a:t>Using virtual &amp; override keywords</a:t>
+              <a:rPr lang="en-US" b="1" dirty="0"/>
+              <a:t>Goal:</a:t>
+            </a:r>
+            <a:r>
+              <a:t> see single inheritance end-to-end</a:t>
+            </a:r>
+          </a:p>
+          <a:p>
+            <a:r>
+              <a:rPr lang="en-US" b="1" dirty="0"/>
+              <a:t>Steps:</a:t>
+            </a:r>
+          </a:p>
+          <a:p>
+            <a:r>
+              <a:t>1. Define an Animal class with Name and an Eat() method</a:t>
+            </a:r>
+          </a:p>
+          <a:p>
+            <a:r>
+              <a:t>2. Define a Dog class that inherits Animal and adds Bark()</a:t>
+            </a:r>
+          </a:p>
+          <a:p>
+            <a:r>
+              <a:t>3. Give Animal a constructor; have Dog forward to it with : base(name)</a:t>
+            </a:r>
+          </a:p>
+          <a:p>
+            <a:r>
+              <a:t>4. Create a Dog, call both Eat() and Bark()</a:t>
+            </a:r>
+          </a:p>
+          <a:p>
+            <a:r>
+              <a:t>5. Print Console output to confirm the order of calls</a:t>
+            </a:r>
+          </a:p>
+          <a:p>
+            <a:r>
+              <a:rPr lang="en-US" b="1" dirty="0"/>
+              <a:t>Stretch:</a:t>
+            </a:r>
+            <a:r>
+              <a:t> add a Puppy class derived from Dog (multilevel)</a:t>
             </a:r>
           </a:p>
         </p:txBody>
       </p:sp>
     </p:spTree>
+    <p:extLst>
+      <p:ext uri="{BB962C8B-B14F-4D97-AF65-F5344CB8AC3E}">
+        <p14:creationId xmlns:p14="http://schemas.microsoft.com/office/powerpoint/2010/main" val="2212082328"/>
+      </p:ext>
+    </p:extLst>
   </p:cSld>
   <p:clrMapOvr>
     <a:masterClrMapping/>
@@ -17512,17 +18658,37 @@
           <a:lstStyle/>
           <a:p>
             <a:r>
-              <a:t>Blueprint for objects</a:t>
-            </a:r>
-          </a:p>
-          <a:p>
-            <a:r>
-              <a:t>Contains fields, methods, properties</a:t>
+              <a:t>A class is a blueprint or template for creating objects</a:t>
+            </a:r>
+          </a:p>
+          <a:p>
+            <a:r>
+              <a:t>Defines state (fields/properties) and behaviour (methods)</a:t>
+            </a:r>
+          </a:p>
+          <a:p>
+            <a:r>
+              <a:t>Reference type — stored on the heap</a:t>
+            </a:r>
+          </a:p>
+          <a:p>
+            <a:r>
+              <a:t>Declared once, instantiated many times</a:t>
+            </a:r>
+          </a:p>
+          <a:p>
+            <a:r>
+              <a:t>Members can be public, private, protected, or internal</a:t>
             </a:r>
           </a:p>
         </p:txBody>
       </p:sp>
     </p:spTree>
+    <p:extLst>
+      <p:ext uri="{BB962C8B-B14F-4D97-AF65-F5344CB8AC3E}">
+        <p14:creationId xmlns:p14="http://schemas.microsoft.com/office/powerpoint/2010/main" val="2493824580"/>
+      </p:ext>
+    </p:extLst>
   </p:cSld>
   <p:clrMapOvr>
     <a:masterClrMapping/>
@@ -17563,7 +18729,7 @@
           <a:lstStyle/>
           <a:p>
             <a:r>
-              <a:t>Static vs Dynamic</a:t>
+              <a:t>Constructor Execution</a:t>
             </a:r>
           </a:p>
         </p:txBody>
@@ -17584,17 +18750,92 @@
           <a:lstStyle/>
           <a:p>
             <a:r>
-              <a:t>Static: faster, compile-time</a:t>
-            </a:r>
-          </a:p>
-          <a:p>
-            <a:r>
-              <a:t>Dynamic: flexible, runtime</a:t>
+              <a:t>Base-class constructor runs </a:t>
+            </a:r>
+            <a:r>
+              <a:rPr lang="en-US" b="1" dirty="0"/>
+              <a:t>before</a:t>
+            </a:r>
+            <a:r>
+              <a:t> the derived constructor</a:t>
+            </a:r>
+          </a:p>
+          <a:p>
+            <a:r>
+              <a:t>Use </a:t>
+            </a:r>
+            <a:r>
+              <a:rPr lang="en-US" dirty="0">
+                <a:latin typeface="Consolas"/>
+              </a:rPr>
+              <a:t>: base(args)</a:t>
+            </a:r>
+            <a:r>
+              <a:t> to call a specific base constructor</a:t>
+            </a:r>
+          </a:p>
+          <a:p>
+            <a:r>
+              <a:t>If you don't, the parameterless base constructor is called automatically</a:t>
+            </a:r>
+          </a:p>
+          <a:p>
+            <a:r>
+              <a:t>Fields initialise top-down: base fields first, then derived fields</a:t>
+            </a:r>
+          </a:p>
+          <a:p>
+            <a:pPr>
+              <a:buNone/>
+            </a:pPr>
+            <a:r>
+              <a:rPr lang="en-US" sz="1400" dirty="0">
+                <a:latin typeface="Consolas"/>
+              </a:rPr>
+              <a:t>class Animal { public Animal(string n) {...} }</a:t>
+            </a:r>
+          </a:p>
+          <a:p>
+            <a:pPr>
+              <a:buNone/>
+            </a:pPr>
+            <a:r>
+              <a:rPr lang="en-US" sz="1400" dirty="0">
+                <a:latin typeface="Consolas"/>
+              </a:rPr>
+              <a:t>class Dog : Animal {</a:t>
+            </a:r>
+          </a:p>
+          <a:p>
+            <a:pPr>
+              <a:buNone/>
+            </a:pPr>
+            <a:r>
+              <a:rPr lang="en-US" sz="1400" dirty="0">
+                <a:latin typeface="Consolas"/>
+              </a:rPr>
+              <a:t>  public Dog(string n) : base(n) { }</a:t>
+            </a:r>
+          </a:p>
+          <a:p>
+            <a:pPr>
+              <a:buNone/>
+            </a:pPr>
+            <a:r>
+              <a:rPr lang="en-US" sz="1400" dirty="0">
+                <a:latin typeface="Consolas"/>
+              </a:rPr>
+              <a:t>}</a:t>
             </a:r>
           </a:p>
         </p:txBody>
       </p:sp>
     </p:spTree>
+    <p:extLst>
+      <p:ext uri="{BB962C8B-B14F-4D97-AF65-F5344CB8AC3E}">
+        <p14:creationId xmlns:p14="http://schemas.microsoft.com/office/powerpoint/2010/main" val="176538221"/>
+      </p:ext>
+    </p:extLst>
   </p:cSld>
   <p:clrMapOvr>
     <a:masterClrMapping/>
@@ -17603,6 +18844,189 @@
 </file>
 
 <file path=ppt/slides/slide21.xml><?xml version="1.0" encoding="utf-8"?>
+<p:sld xmlns:a="http://schemas.openxmlformats.org/drawingml/2006/main" xmlns:r="http://schemas.openxmlformats.org/officeDocument/2006/relationships" xmlns:p="http://schemas.openxmlformats.org/presentationml/2006/main">
+  <p:cSld>
+    <p:spTree>
+      <p:nvGrpSpPr>
+        <p:cNvPr id="1" name=""/>
+        <p:cNvGrpSpPr/>
+        <p:nvPr/>
+      </p:nvGrpSpPr>
+      <p:grpSpPr>
+        <a:xfrm>
+          <a:off x="0" y="0"/>
+          <a:ext cx="0" cy="0"/>
+          <a:chOff x="0" y="0"/>
+          <a:chExt cx="0" cy="0"/>
+        </a:xfrm>
+      </p:grpSpPr>
+      <p:sp>
+        <p:nvSpPr>
+          <p:cNvPr id="2" name="Title 1">
+            <a:extLst>
+              <a:ext uri="{FF2B5EF4-FFF2-40B4-BE49-F238E27FC236}">
+                <a16:creationId xmlns:a16="http://schemas.microsoft.com/office/drawing/2014/main" id="{BCFEA3F1-2D4E-7463-DA76-56AA7278F6B7}"/>
+              </a:ext>
+            </a:extLst>
+          </p:cNvPr>
+          <p:cNvSpPr>
+            <a:spLocks noGrp="1"/>
+          </p:cNvSpPr>
+          <p:nvPr>
+            <p:ph type="title"/>
+          </p:nvPr>
+        </p:nvSpPr>
+        <p:spPr/>
+        <p:txBody>
+          <a:bodyPr/>
+          <a:lstStyle/>
+          <a:p>
+            <a:r>
+              <a:rPr lang="en-IN"/>
+              <a:t>The 'base' Keyword</a:t>
+            </a:r>
+          </a:p>
+        </p:txBody>
+      </p:sp>
+      <p:sp>
+        <p:nvSpPr>
+          <p:cNvPr id="3" name="Content Placeholder 2">
+            <a:extLst>
+              <a:ext uri="{FF2B5EF4-FFF2-40B4-BE49-F238E27FC236}">
+                <a16:creationId xmlns:a16="http://schemas.microsoft.com/office/drawing/2014/main" id="{5EC4710C-BBE9-C15F-4C2F-2F96A7CD4394}"/>
+              </a:ext>
+            </a:extLst>
+          </p:cNvPr>
+          <p:cNvSpPr>
+            <a:spLocks noGrp="1"/>
+          </p:cNvSpPr>
+          <p:nvPr>
+            <p:ph idx="1"/>
+          </p:nvPr>
+        </p:nvSpPr>
+        <p:spPr/>
+        <p:txBody>
+          <a:bodyPr/>
+          <a:lstStyle/>
+          <a:p>
+            <a:r>
+              <a:rPr lang="en-US"/>
+              <a:t>Accesses members of the immediate base class
+base(args) — call a specific base constructor
+base.Method() — call the base implementation of a member
+Useful when a derived method extends rather than replaces the base behaviour
+Cannot be used inside static members
+Most often paired with 'override' (covered in Module 6)</a:t>
+            </a:r>
+            <a:endParaRPr lang="en-IN"/>
+          </a:p>
+        </p:txBody>
+      </p:sp>
+    </p:spTree>
+    <p:extLst>
+      <p:ext uri="{BB962C8B-B14F-4D97-AF65-F5344CB8AC3E}">
+        <p14:creationId xmlns:p14="http://schemas.microsoft.com/office/powerpoint/2010/main" val="2066015265"/>
+      </p:ext>
+    </p:extLst>
+  </p:cSld>
+  <p:clrMapOvr>
+    <a:masterClrMapping/>
+  </p:clrMapOvr>
+</p:sld>
+</file>
+
+<file path=ppt/slides/slide22.xml><?xml version="1.0" encoding="utf-8"?>
+<p:sld xmlns:a="http://schemas.openxmlformats.org/drawingml/2006/main" xmlns:r="http://schemas.openxmlformats.org/officeDocument/2006/relationships" xmlns:p="http://schemas.openxmlformats.org/presentationml/2006/main">
+  <p:cSld>
+    <p:spTree>
+      <p:nvGrpSpPr>
+        <p:cNvPr id="1" name=""/>
+        <p:cNvGrpSpPr/>
+        <p:nvPr/>
+      </p:nvGrpSpPr>
+      <p:grpSpPr>
+        <a:xfrm>
+          <a:off x="0" y="0"/>
+          <a:ext cx="0" cy="0"/>
+          <a:chOff x="0" y="0"/>
+          <a:chExt cx="0" cy="0"/>
+        </a:xfrm>
+      </p:grpSpPr>
+      <p:sp>
+        <p:nvSpPr>
+          <p:cNvPr id="2" name="Title 1">
+            <a:extLst>
+              <a:ext uri="{FF2B5EF4-FFF2-40B4-BE49-F238E27FC236}">
+                <a16:creationId xmlns:a16="http://schemas.microsoft.com/office/drawing/2014/main" id="{8CDA11CF-B132-1CC8-5B35-3B4D2EE2248D}"/>
+              </a:ext>
+            </a:extLst>
+          </p:cNvPr>
+          <p:cNvSpPr>
+            <a:spLocks noGrp="1"/>
+          </p:cNvSpPr>
+          <p:nvPr>
+            <p:ph type="title"/>
+          </p:nvPr>
+        </p:nvSpPr>
+        <p:spPr/>
+        <p:txBody>
+          <a:bodyPr/>
+          <a:lstStyle/>
+          <a:p>
+            <a:r>
+              <a:rPr lang="en-IN"/>
+              <a:t>Sealed Classes &amp; Members</a:t>
+            </a:r>
+          </a:p>
+        </p:txBody>
+      </p:sp>
+      <p:sp>
+        <p:nvSpPr>
+          <p:cNvPr id="3" name="Content Placeholder 2">
+            <a:extLst>
+              <a:ext uri="{FF2B5EF4-FFF2-40B4-BE49-F238E27FC236}">
+                <a16:creationId xmlns:a16="http://schemas.microsoft.com/office/drawing/2014/main" id="{57D8311F-105E-D9A8-9FA4-AED566CDF7B5}"/>
+              </a:ext>
+            </a:extLst>
+          </p:cNvPr>
+          <p:cNvSpPr>
+            <a:spLocks noGrp="1"/>
+          </p:cNvSpPr>
+          <p:nvPr>
+            <p:ph idx="1"/>
+          </p:nvPr>
+        </p:nvSpPr>
+        <p:spPr/>
+        <p:txBody>
+          <a:bodyPr/>
+          <a:lstStyle/>
+          <a:p>
+            <a:r>
+              <a:rPr lang="en-US"/>
+              <a:t>sealed class — cannot be inherited from
+sealed override — stops further overriding of a virtual member
+Use sealed when the design is complete and further extension would be risky
+Most built-in value-style classes are sealed (e.g. string)
+Common with security-sensitive or immutable types</a:t>
+            </a:r>
+            <a:endParaRPr lang="en-IN"/>
+          </a:p>
+        </p:txBody>
+      </p:sp>
+    </p:spTree>
+    <p:extLst>
+      <p:ext uri="{BB962C8B-B14F-4D97-AF65-F5344CB8AC3E}">
+        <p14:creationId xmlns:p14="http://schemas.microsoft.com/office/powerpoint/2010/main" val="2461344526"/>
+      </p:ext>
+    </p:extLst>
+  </p:cSld>
+  <p:clrMapOvr>
+    <a:masterClrMapping/>
+  </p:clrMapOvr>
+</p:sld>
+</file>
+
+<file path=ppt/slides/slide23.xml><?xml version="1.0" encoding="utf-8"?>
 <p:sld xmlns:a="http://schemas.openxmlformats.org/drawingml/2006/main" xmlns:r="http://schemas.openxmlformats.org/officeDocument/2006/relationships" xmlns:p="http://schemas.openxmlformats.org/presentationml/2006/main">
   <p:cSld>
     <p:spTree>
@@ -17635,7 +19059,8 @@
           <a:lstStyle/>
           <a:p>
             <a:r>
-              <a:t>Hands-On Lab (Module 6)</a:t>
+              <a:rPr lang="en-US" dirty="0"/>
+              <a:t>Lab 5.2 - Vehicle Hierarchy</a:t>
             </a:r>
           </a:p>
         </p:txBody>
@@ -17656,17 +19081,1323 @@
           <a:lstStyle/>
           <a:p>
             <a:r>
-              <a:t>Create Shape class</a:t>
-            </a:r>
-          </a:p>
-          <a:p>
-            <a:r>
-              <a:t>Override Area() in Circle, Rectangle</a:t>
+              <a:rPr lang="en-US" b="1" dirty="0"/>
+              <a:t>Goal:</a:t>
+            </a:r>
+            <a:r>
+              <a:t> practise single + hierarchical inheritance</a:t>
+            </a:r>
+          </a:p>
+          <a:p>
+            <a:r>
+              <a:rPr lang="en-US" b="1" dirty="0"/>
+              <a:t>Steps:</a:t>
+            </a:r>
+          </a:p>
+          <a:p>
+            <a:r>
+              <a:t>1. Create a Vehicle base class with Brand, Speed, and Start()</a:t>
+            </a:r>
+          </a:p>
+          <a:p>
+            <a:r>
+              <a:t>2. Derive Car and Bike from Vehicle</a:t>
+            </a:r>
+          </a:p>
+          <a:p>
+            <a:r>
+              <a:t>3. Add a constructor on each that calls base(...)</a:t>
+            </a:r>
+          </a:p>
+          <a:p>
+            <a:r>
+              <a:t>4. Add Car.NumberOfDoors and Bike.HasCarrier</a:t>
+            </a:r>
+          </a:p>
+          <a:p>
+            <a:r>
+              <a:t>5. In Main, instantiate one of each and call Start()</a:t>
+            </a:r>
+          </a:p>
+          <a:p>
+            <a:r>
+              <a:rPr lang="en-US" b="1" dirty="0"/>
+              <a:t>Stretch:</a:t>
+            </a:r>
+            <a:r>
+              <a:t> derive ElectricCar from Car and add BatteryKWh</a:t>
             </a:r>
           </a:p>
         </p:txBody>
       </p:sp>
     </p:spTree>
+    <p:extLst>
+      <p:ext uri="{BB962C8B-B14F-4D97-AF65-F5344CB8AC3E}">
+        <p14:creationId xmlns:p14="http://schemas.microsoft.com/office/powerpoint/2010/main" val="3412409301"/>
+      </p:ext>
+    </p:extLst>
+  </p:cSld>
+  <p:clrMapOvr>
+    <a:masterClrMapping/>
+  </p:clrMapOvr>
+</p:sld>
+</file>
+
+<file path=ppt/slides/slide24.xml><?xml version="1.0" encoding="utf-8"?>
+<p:sld xmlns:a="http://schemas.openxmlformats.org/drawingml/2006/main" xmlns:r="http://schemas.openxmlformats.org/officeDocument/2006/relationships" xmlns:p="http://schemas.openxmlformats.org/presentationml/2006/main">
+  <p:cSld>
+    <p:spTree>
+      <p:nvGrpSpPr>
+        <p:cNvPr id="1" name=""/>
+        <p:cNvGrpSpPr/>
+        <p:nvPr/>
+      </p:nvGrpSpPr>
+      <p:grpSpPr>
+        <a:xfrm>
+          <a:off x="0" y="0"/>
+          <a:ext cx="0" cy="0"/>
+          <a:chOff x="0" y="0"/>
+          <a:chExt cx="0" cy="0"/>
+        </a:xfrm>
+      </p:grpSpPr>
+      <p:sp>
+        <p:nvSpPr>
+          <p:cNvPr id="2" name="Title 1"/>
+          <p:cNvSpPr>
+            <a:spLocks noGrp="1"/>
+          </p:cNvSpPr>
+          <p:nvPr>
+            <p:ph type="title"/>
+          </p:nvPr>
+        </p:nvSpPr>
+        <p:spPr/>
+        <p:txBody>
+          <a:bodyPr/>
+          <a:lstStyle/>
+          <a:p>
+            <a:r>
+              <a:t>Module 6: Polymorphism</a:t>
+            </a:r>
+          </a:p>
+        </p:txBody>
+      </p:sp>
+      <p:sp>
+        <p:nvSpPr>
+          <p:cNvPr id="3" name="Content Placeholder 2"/>
+          <p:cNvSpPr>
+            <a:spLocks noGrp="1"/>
+          </p:cNvSpPr>
+          <p:nvPr>
+            <p:ph idx="1"/>
+          </p:nvPr>
+        </p:nvSpPr>
+        <p:spPr/>
+        <p:txBody>
+          <a:bodyPr/>
+          <a:lstStyle/>
+          <a:p>
+            <a:r>
+              <a:rPr lang="en-US" dirty="0"/>
+              <a:t>"Many forms" — same name, different behavior</a:t>
+            </a:r>
+          </a:p>
+          <a:p>
+            <a:r>
+              <a:rPr lang="en-US" dirty="0"/>
+              <a:t>A core OOP pillar alongside encapsulation, abstraction, inheritance</a:t>
+            </a:r>
+          </a:p>
+          <a:p>
+            <a:r>
+              <a:rPr lang="en-US" dirty="0"/>
+              <a:t>Lets you write code that works with a base type but executes specialized logic</a:t>
+            </a:r>
+          </a:p>
+          <a:p>
+            <a:r>
+              <a:rPr lang="en-US" dirty="0"/>
+              <a:t>Two flavors in C#: compile-time (overloading) and runtime (overriding)</a:t>
+            </a:r>
+          </a:p>
+          <a:p>
+            <a:r>
+              <a:rPr lang="en-US" dirty="0"/>
+              <a:t>Why it matters: extensibility, cleaner APIs, less branching in client code</a:t>
+            </a:r>
+          </a:p>
+          <a:p>
+            <a:r>
+              <a:rPr lang="en-US" dirty="0"/>
+              <a:t>In this module: overloading, overriding, base/virtual/sealed, dispatch internals</a:t>
+            </a:r>
+          </a:p>
+        </p:txBody>
+      </p:sp>
+    </p:spTree>
+    <p:extLst>
+      <p:ext uri="{BB962C8B-B14F-4D97-AF65-F5344CB8AC3E}">
+        <p14:creationId xmlns:p14="http://schemas.microsoft.com/office/powerpoint/2010/main" val="271056497"/>
+      </p:ext>
+    </p:extLst>
+  </p:cSld>
+  <p:clrMapOvr>
+    <a:masterClrMapping/>
+  </p:clrMapOvr>
+</p:sld>
+</file>
+
+<file path=ppt/slides/slide25.xml><?xml version="1.0" encoding="utf-8"?>
+<p:sld xmlns:a="http://schemas.openxmlformats.org/drawingml/2006/main" xmlns:r="http://schemas.openxmlformats.org/officeDocument/2006/relationships" xmlns:p="http://schemas.openxmlformats.org/presentationml/2006/main">
+  <p:cSld>
+    <p:spTree>
+      <p:nvGrpSpPr>
+        <p:cNvPr id="1" name=""/>
+        <p:cNvGrpSpPr/>
+        <p:nvPr/>
+      </p:nvGrpSpPr>
+      <p:grpSpPr>
+        <a:xfrm>
+          <a:off x="0" y="0"/>
+          <a:ext cx="0" cy="0"/>
+          <a:chOff x="0" y="0"/>
+          <a:chExt cx="0" cy="0"/>
+        </a:xfrm>
+      </p:grpSpPr>
+      <p:sp>
+        <p:nvSpPr>
+          <p:cNvPr id="2" name="Title 1"/>
+          <p:cNvSpPr>
+            <a:spLocks noGrp="1"/>
+          </p:cNvSpPr>
+          <p:nvPr>
+            <p:ph type="title"/>
+          </p:nvPr>
+        </p:nvSpPr>
+        <p:spPr/>
+        <p:txBody>
+          <a:bodyPr/>
+          <a:lstStyle/>
+          <a:p>
+            <a:r>
+              <a:t>Types of Polymorphism</a:t>
+            </a:r>
+          </a:p>
+        </p:txBody>
+      </p:sp>
+      <p:sp>
+        <p:nvSpPr>
+          <p:cNvPr id="3" name="Content Placeholder 2"/>
+          <p:cNvSpPr>
+            <a:spLocks noGrp="1"/>
+          </p:cNvSpPr>
+          <p:nvPr>
+            <p:ph idx="1"/>
+          </p:nvPr>
+        </p:nvSpPr>
+        <p:spPr/>
+        <p:txBody>
+          <a:bodyPr/>
+          <a:lstStyle/>
+          <a:p>
+            <a:r>
+              <a:rPr lang="en-US" b="1" dirty="0"/>
+              <a:t>Compile-time (static) polymorphism</a:t>
+            </a:r>
+          </a:p>
+          <a:p>
+            <a:pPr lvl="1"/>
+            <a:r>
+              <a:rPr lang="en-US" dirty="0"/>
+              <a:t>Resolved by the compiler based on method signature</a:t>
+            </a:r>
+          </a:p>
+          <a:p>
+            <a:pPr lvl="1"/>
+            <a:r>
+              <a:rPr lang="en-US" dirty="0"/>
+              <a:t>Achieved via method overloading and operator overloading</a:t>
+            </a:r>
+          </a:p>
+          <a:p>
+            <a:pPr lvl="1"/>
+            <a:r>
+              <a:rPr lang="en-US" dirty="0"/>
+              <a:t>Faster — decision is made at build time</a:t>
+            </a:r>
+          </a:p>
+          <a:p>
+            <a:r>
+              <a:rPr lang="en-US" b="1" dirty="0"/>
+              <a:t>Runtime (dynamic) polymorphism</a:t>
+            </a:r>
+          </a:p>
+          <a:p>
+            <a:pPr lvl="1"/>
+            <a:r>
+              <a:rPr lang="en-US" dirty="0"/>
+              <a:t>Resolved at runtime based on the actual object type</a:t>
+            </a:r>
+          </a:p>
+          <a:p>
+            <a:pPr lvl="1"/>
+            <a:r>
+              <a:rPr lang="en-US" dirty="0"/>
+              <a:t>Achieved via method overriding (virtual / override)</a:t>
+            </a:r>
+          </a:p>
+          <a:p>
+            <a:pPr lvl="1"/>
+            <a:r>
+              <a:rPr lang="en-US" dirty="0"/>
+              <a:t>More flexible — enables true plug-in behavior</a:t>
+            </a:r>
+          </a:p>
+        </p:txBody>
+      </p:sp>
+    </p:spTree>
+    <p:extLst>
+      <p:ext uri="{BB962C8B-B14F-4D97-AF65-F5344CB8AC3E}">
+        <p14:creationId xmlns:p14="http://schemas.microsoft.com/office/powerpoint/2010/main" val="2704576355"/>
+      </p:ext>
+    </p:extLst>
+  </p:cSld>
+  <p:clrMapOvr>
+    <a:masterClrMapping/>
+  </p:clrMapOvr>
+</p:sld>
+</file>
+
+<file path=ppt/slides/slide26.xml><?xml version="1.0" encoding="utf-8"?>
+<p:sld xmlns:a="http://schemas.openxmlformats.org/drawingml/2006/main" xmlns:r="http://schemas.openxmlformats.org/officeDocument/2006/relationships" xmlns:p="http://schemas.openxmlformats.org/presentationml/2006/main">
+  <p:cSld>
+    <p:spTree>
+      <p:nvGrpSpPr>
+        <p:cNvPr id="1" name=""/>
+        <p:cNvGrpSpPr/>
+        <p:nvPr/>
+      </p:nvGrpSpPr>
+      <p:grpSpPr>
+        <a:xfrm>
+          <a:off x="0" y="0"/>
+          <a:ext cx="0" cy="0"/>
+          <a:chOff x="0" y="0"/>
+          <a:chExt cx="0" cy="0"/>
+        </a:xfrm>
+      </p:grpSpPr>
+      <p:sp>
+        <p:nvSpPr>
+          <p:cNvPr id="2" name="Title 1">
+            <a:extLst>
+              <a:ext uri="{FF2B5EF4-FFF2-40B4-BE49-F238E27FC236}">
+                <a16:creationId xmlns:a16="http://schemas.microsoft.com/office/drawing/2014/main" id="{370268C2-F3BA-4745-E646-88007BB742AB}"/>
+              </a:ext>
+            </a:extLst>
+          </p:cNvPr>
+          <p:cNvSpPr>
+            <a:spLocks noGrp="1"/>
+          </p:cNvSpPr>
+          <p:nvPr>
+            <p:ph type="title"/>
+          </p:nvPr>
+        </p:nvSpPr>
+        <p:spPr/>
+        <p:txBody>
+          <a:bodyPr/>
+          <a:lstStyle/>
+          <a:p>
+            <a:r>
+              <a:rPr lang="en-US" dirty="0"/>
+              <a:t>Virtual Dispatch - How It Works</a:t>
+            </a:r>
+            <a:endParaRPr lang="en-IN" dirty="0"/>
+          </a:p>
+        </p:txBody>
+      </p:sp>
+      <p:sp>
+        <p:nvSpPr>
+          <p:cNvPr id="3" name="Rectangle 2">
+            <a:extLst>
+              <a:ext uri="{FF2B5EF4-FFF2-40B4-BE49-F238E27FC236}">
+                <a16:creationId xmlns:a16="http://schemas.microsoft.com/office/drawing/2014/main" id="{7EC8CE6A-7C5B-42D5-B140-4D8845A2C343}"/>
+              </a:ext>
+            </a:extLst>
+          </p:cNvPr>
+          <p:cNvSpPr/>
+          <p:nvPr/>
+        </p:nvSpPr>
+        <p:spPr>
+          <a:xfrm>
+            <a:off x="762000" y="2222500"/>
+            <a:ext cx="3556000" cy="1016000"/>
+          </a:xfrm>
+          <a:prstGeom prst="rect">
+            <a:avLst/>
+          </a:prstGeom>
+          <a:solidFill>
+            <a:srgbClr val="F4F4F4"/>
+          </a:solidFill>
+          <a:ln w="9525" cap="flat" cmpd="sng" algn="ctr">
+            <a:solidFill>
+              <a:srgbClr val="999999"/>
+            </a:solidFill>
+            <a:prstDash val="solid"/>
+          </a:ln>
+        </p:spPr>
+        <p:style>
+          <a:lnRef idx="2">
+            <a:schemeClr val="accent1">
+              <a:shade val="15000"/>
+            </a:schemeClr>
+          </a:lnRef>
+          <a:fillRef idx="1">
+            <a:schemeClr val="accent1"/>
+          </a:fillRef>
+          <a:effectRef idx="0">
+            <a:schemeClr val="accent1"/>
+          </a:effectRef>
+          <a:fontRef idx="minor">
+            <a:schemeClr val="lt1"/>
+          </a:fontRef>
+        </p:style>
+        <p:txBody>
+          <a:bodyPr vertOverflow="clip" horzOverflow="clip" rtlCol="0" anchor="ctr" anchorCtr="0">
+            <a:noAutofit/>
+          </a:bodyPr>
+          <a:lstStyle/>
+          <a:p>
+            <a:pPr algn="l"/>
+            <a:r>
+              <a:rPr lang="en-US" sz="1400">
+                <a:solidFill>
+                  <a:srgbClr val="222222"/>
+                </a:solidFill>
+                <a:latin typeface="Consolas"/>
+              </a:rPr>
+              <a:t>Animal a = new Dog();
+a.Speak();</a:t>
+            </a:r>
+            <a:endParaRPr lang="en-IN" sz="1400">
+              <a:solidFill>
+                <a:srgbClr val="222222"/>
+              </a:solidFill>
+              <a:latin typeface="Consolas"/>
+            </a:endParaRPr>
+          </a:p>
+        </p:txBody>
+      </p:sp>
+      <p:sp>
+        <p:nvSpPr>
+          <p:cNvPr id="4" name="Rectangle 3">
+            <a:extLst>
+              <a:ext uri="{FF2B5EF4-FFF2-40B4-BE49-F238E27FC236}">
+                <a16:creationId xmlns:a16="http://schemas.microsoft.com/office/drawing/2014/main" id="{69385CB7-8CEA-4BC3-A8A4-C4271114EE1F}"/>
+              </a:ext>
+            </a:extLst>
+          </p:cNvPr>
+          <p:cNvSpPr/>
+          <p:nvPr/>
+        </p:nvSpPr>
+        <p:spPr>
+          <a:xfrm>
+            <a:off x="4826000" y="2222500"/>
+            <a:ext cx="3556000" cy="1016000"/>
+          </a:xfrm>
+          <a:prstGeom prst="rect">
+            <a:avLst/>
+          </a:prstGeom>
+          <a:solidFill>
+            <a:srgbClr val="1A6E96"/>
+          </a:solidFill>
+          <a:ln w="15875" cap="flat" cmpd="sng" algn="ctr">
+            <a:noFill/>
+            <a:prstDash val="solid"/>
+          </a:ln>
+        </p:spPr>
+        <p:style>
+          <a:lnRef idx="2">
+            <a:schemeClr val="accent1">
+              <a:shade val="15000"/>
+            </a:schemeClr>
+          </a:lnRef>
+          <a:fillRef idx="1">
+            <a:schemeClr val="accent1"/>
+          </a:fillRef>
+          <a:effectRef idx="0">
+            <a:schemeClr val="accent1"/>
+          </a:effectRef>
+          <a:fontRef idx="minor">
+            <a:schemeClr val="lt1"/>
+          </a:fontRef>
+        </p:style>
+        <p:txBody>
+          <a:bodyPr vertOverflow="clip" horzOverflow="clip" wrap="square" rtlCol="0" anchor="ctr" anchorCtr="0">
+            <a:noAutofit/>
+          </a:bodyPr>
+          <a:lstStyle/>
+          <a:p>
+            <a:pPr algn="l"/>
+            <a:r>
+              <a:rPr lang="en-US" sz="1400" b="1">
+                <a:solidFill>
+                  <a:srgbClr val="FFFFFF"/>
+                </a:solidFill>
+              </a:rPr>
+              <a:t>Compile-time type: Animal
+(reference type)</a:t>
+            </a:r>
+            <a:endParaRPr lang="en-IN" sz="1400" b="1">
+              <a:solidFill>
+                <a:srgbClr val="FFFFFF"/>
+              </a:solidFill>
+            </a:endParaRPr>
+          </a:p>
+        </p:txBody>
+      </p:sp>
+      <p:sp>
+        <p:nvSpPr>
+          <p:cNvPr id="5" name="Arrow: Down 4">
+            <a:extLst>
+              <a:ext uri="{FF2B5EF4-FFF2-40B4-BE49-F238E27FC236}">
+                <a16:creationId xmlns:a16="http://schemas.microsoft.com/office/drawing/2014/main" id="{4B3FD715-CA05-4618-9A37-E95D40606CD1}"/>
+              </a:ext>
+            </a:extLst>
+          </p:cNvPr>
+          <p:cNvSpPr/>
+          <p:nvPr/>
+        </p:nvSpPr>
+        <p:spPr>
+          <a:xfrm>
+            <a:off x="4318000" y="2984500"/>
+            <a:ext cx="508000" cy="635000"/>
+          </a:xfrm>
+          <a:prstGeom prst="downArrow">
+            <a:avLst/>
+          </a:prstGeom>
+          <a:solidFill>
+            <a:srgbClr val="6F9C3D"/>
+          </a:solidFill>
+          <a:ln w="15875" cap="flat" cmpd="sng" algn="ctr">
+            <a:noFill/>
+            <a:prstDash val="solid"/>
+          </a:ln>
+        </p:spPr>
+        <p:style>
+          <a:lnRef idx="2">
+            <a:schemeClr val="accent1">
+              <a:shade val="15000"/>
+            </a:schemeClr>
+          </a:lnRef>
+          <a:fillRef idx="1">
+            <a:schemeClr val="accent1"/>
+          </a:fillRef>
+          <a:effectRef idx="0">
+            <a:schemeClr val="accent1"/>
+          </a:effectRef>
+          <a:fontRef idx="minor">
+            <a:schemeClr val="lt1"/>
+          </a:fontRef>
+        </p:style>
+        <p:txBody>
+          <a:bodyPr vertOverflow="clip" horzOverflow="clip" rtlCol="0" anchor="t"/>
+          <a:lstStyle/>
+          <a:p>
+            <a:pPr algn="l"/>
+            <a:endParaRPr lang="en-IN"/>
+          </a:p>
+        </p:txBody>
+      </p:sp>
+      <p:sp>
+        <p:nvSpPr>
+          <p:cNvPr id="6" name="TextBox 5">
+            <a:extLst>
+              <a:ext uri="{FF2B5EF4-FFF2-40B4-BE49-F238E27FC236}">
+                <a16:creationId xmlns:a16="http://schemas.microsoft.com/office/drawing/2014/main" id="{F1AE73AC-B966-4CB0-86DC-7AEEC98FE446}"/>
+              </a:ext>
+            </a:extLst>
+          </p:cNvPr>
+          <p:cNvSpPr txBox="1"/>
+          <p:nvPr/>
+        </p:nvSpPr>
+        <p:spPr>
+          <a:xfrm>
+            <a:off x="2159000" y="3111500"/>
+            <a:ext cx="2159000" cy="381000"/>
+          </a:xfrm>
+          <a:prstGeom prst="rect">
+            <a:avLst/>
+          </a:prstGeom>
+          <a:noFill/>
+        </p:spPr>
+        <p:txBody>
+          <a:bodyPr vertOverflow="overflow" vert="horz" wrap="square" rtlCol="0" anchor="ctr" anchorCtr="0">
+            <a:spAutoFit/>
+          </a:bodyPr>
+          <a:lstStyle/>
+          <a:p>
+            <a:pPr algn="l"/>
+            <a:r>
+              <a:rPr lang="en-US" sz="1200" i="1">
+                <a:solidFill>
+                  <a:srgbClr val="444444"/>
+                </a:solidFill>
+              </a:rPr>
+              <a:t>at runtime, CLR checks object's actual type</a:t>
+            </a:r>
+            <a:endParaRPr lang="en-IN" sz="1200" i="1">
+              <a:solidFill>
+                <a:srgbClr val="444444"/>
+              </a:solidFill>
+            </a:endParaRPr>
+          </a:p>
+        </p:txBody>
+      </p:sp>
+      <p:sp>
+        <p:nvSpPr>
+          <p:cNvPr id="7" name="TextBox 6">
+            <a:extLst>
+              <a:ext uri="{FF2B5EF4-FFF2-40B4-BE49-F238E27FC236}">
+                <a16:creationId xmlns:a16="http://schemas.microsoft.com/office/drawing/2014/main" id="{2B6E0DF4-0EE0-4756-87C8-7572BE648055}"/>
+              </a:ext>
+            </a:extLst>
+          </p:cNvPr>
+          <p:cNvSpPr txBox="1"/>
+          <p:nvPr/>
+        </p:nvSpPr>
+        <p:spPr>
+          <a:xfrm>
+            <a:off x="4826000" y="3111500"/>
+            <a:ext cx="3048000" cy="381000"/>
+          </a:xfrm>
+          <a:prstGeom prst="rect">
+            <a:avLst/>
+          </a:prstGeom>
+          <a:noFill/>
+        </p:spPr>
+        <p:txBody>
+          <a:bodyPr vertOverflow="overflow" vert="horz" wrap="square" rtlCol="0" anchor="ctr" anchorCtr="0">
+            <a:spAutoFit/>
+          </a:bodyPr>
+          <a:lstStyle/>
+          <a:p>
+            <a:pPr algn="l"/>
+            <a:r>
+              <a:rPr lang="en-US" sz="1200" i="1">
+                <a:solidFill>
+                  <a:srgbClr val="444444"/>
+                </a:solidFill>
+              </a:rPr>
+              <a:t>looks up Dog's override of Speak()</a:t>
+            </a:r>
+            <a:endParaRPr lang="en-IN" sz="1200" i="1">
+              <a:solidFill>
+                <a:srgbClr val="444444"/>
+              </a:solidFill>
+            </a:endParaRPr>
+          </a:p>
+        </p:txBody>
+      </p:sp>
+      <p:sp>
+        <p:nvSpPr>
+          <p:cNvPr id="8" name="Rectangle 7">
+            <a:extLst>
+              <a:ext uri="{FF2B5EF4-FFF2-40B4-BE49-F238E27FC236}">
+                <a16:creationId xmlns:a16="http://schemas.microsoft.com/office/drawing/2014/main" id="{B0EDD755-EB70-4193-A2CB-3172CEA5A05E}"/>
+              </a:ext>
+            </a:extLst>
+          </p:cNvPr>
+          <p:cNvSpPr/>
+          <p:nvPr/>
+        </p:nvSpPr>
+        <p:spPr>
+          <a:xfrm>
+            <a:off x="762000" y="3810000"/>
+            <a:ext cx="3556000" cy="1016000"/>
+          </a:xfrm>
+          <a:prstGeom prst="rect">
+            <a:avLst/>
+          </a:prstGeom>
+          <a:solidFill>
+            <a:srgbClr val="6F9C3D"/>
+          </a:solidFill>
+          <a:ln w="15875" cap="flat" cmpd="sng" algn="ctr">
+            <a:noFill/>
+            <a:prstDash val="solid"/>
+          </a:ln>
+        </p:spPr>
+        <p:style>
+          <a:lnRef idx="2">
+            <a:schemeClr val="accent1">
+              <a:shade val="15000"/>
+            </a:schemeClr>
+          </a:lnRef>
+          <a:fillRef idx="1">
+            <a:schemeClr val="accent1"/>
+          </a:fillRef>
+          <a:effectRef idx="0">
+            <a:schemeClr val="accent1"/>
+          </a:effectRef>
+          <a:fontRef idx="minor">
+            <a:schemeClr val="lt1"/>
+          </a:fontRef>
+        </p:style>
+        <p:txBody>
+          <a:bodyPr vertOverflow="clip" horzOverflow="clip" wrap="square" rtlCol="0" anchor="ctr" anchorCtr="0">
+            <a:noAutofit/>
+          </a:bodyPr>
+          <a:lstStyle/>
+          <a:p>
+            <a:pPr algn="l"/>
+            <a:r>
+              <a:rPr lang="en-IN" sz="1600" b="1">
+                <a:solidFill>
+                  <a:srgbClr val="FFFFFF"/>
+                </a:solidFill>
+              </a:rPr>
+              <a:t>Actual object: Dog</a:t>
+            </a:r>
+          </a:p>
+        </p:txBody>
+      </p:sp>
+      <p:sp>
+        <p:nvSpPr>
+          <p:cNvPr id="9" name="Rectangle 8">
+            <a:extLst>
+              <a:ext uri="{FF2B5EF4-FFF2-40B4-BE49-F238E27FC236}">
+                <a16:creationId xmlns:a16="http://schemas.microsoft.com/office/drawing/2014/main" id="{9BE759F6-3D33-4B21-AD12-2FFA90E20360}"/>
+              </a:ext>
+            </a:extLst>
+          </p:cNvPr>
+          <p:cNvSpPr/>
+          <p:nvPr/>
+        </p:nvSpPr>
+        <p:spPr>
+          <a:xfrm>
+            <a:off x="4826000" y="3810000"/>
+            <a:ext cx="3556000" cy="1016000"/>
+          </a:xfrm>
+          <a:prstGeom prst="rect">
+            <a:avLst/>
+          </a:prstGeom>
+          <a:solidFill>
+            <a:srgbClr val="1A6E96"/>
+          </a:solidFill>
+          <a:ln w="15875" cap="flat" cmpd="sng" algn="ctr">
+            <a:noFill/>
+            <a:prstDash val="solid"/>
+          </a:ln>
+        </p:spPr>
+        <p:style>
+          <a:lnRef idx="2">
+            <a:schemeClr val="accent1">
+              <a:shade val="15000"/>
+            </a:schemeClr>
+          </a:lnRef>
+          <a:fillRef idx="1">
+            <a:schemeClr val="accent1"/>
+          </a:fillRef>
+          <a:effectRef idx="0">
+            <a:schemeClr val="accent1"/>
+          </a:effectRef>
+          <a:fontRef idx="minor">
+            <a:schemeClr val="lt1"/>
+          </a:fontRef>
+        </p:style>
+        <p:txBody>
+          <a:bodyPr vertOverflow="clip" horzOverflow="clip" wrap="square" rtlCol="0" anchor="ctr" anchorCtr="0">
+            <a:noAutofit/>
+          </a:bodyPr>
+          <a:lstStyle/>
+          <a:p>
+            <a:pPr algn="l"/>
+            <a:r>
+              <a:rPr lang="en-IN" sz="1400" b="1">
+                <a:solidFill>
+                  <a:srgbClr val="FFFFFF"/>
+                </a:solidFill>
+              </a:rPr>
+              <a:t>Calls Dog.Speak()
+→ "Woof!"</a:t>
+            </a:r>
+          </a:p>
+        </p:txBody>
+      </p:sp>
+      <p:sp>
+        <p:nvSpPr>
+          <p:cNvPr id="10" name="TextBox 9">
+            <a:extLst>
+              <a:ext uri="{FF2B5EF4-FFF2-40B4-BE49-F238E27FC236}">
+                <a16:creationId xmlns:a16="http://schemas.microsoft.com/office/drawing/2014/main" id="{301D92CB-8B23-4E57-B1D6-687E7DBEF545}"/>
+              </a:ext>
+            </a:extLst>
+          </p:cNvPr>
+          <p:cNvSpPr txBox="1"/>
+          <p:nvPr/>
+        </p:nvSpPr>
+        <p:spPr>
+          <a:xfrm>
+            <a:off x="762000" y="5969000"/>
+            <a:ext cx="7620000" cy="508000"/>
+          </a:xfrm>
+          <a:prstGeom prst="rect">
+            <a:avLst/>
+          </a:prstGeom>
+          <a:noFill/>
+        </p:spPr>
+        <p:txBody>
+          <a:bodyPr vertOverflow="overflow" vert="horz" wrap="square" rtlCol="0" anchor="t">
+            <a:spAutoFit/>
+          </a:bodyPr>
+          <a:lstStyle/>
+          <a:p>
+            <a:pPr algn="l"/>
+            <a:r>
+              <a:rPr lang="en-US" sz="1400" i="1">
+                <a:solidFill>
+                  <a:srgbClr val="444444"/>
+                </a:solidFill>
+              </a:rPr>
+              <a:t>Variable type decides what's legal to call; object's actual type decides which override runs.</a:t>
+            </a:r>
+            <a:endParaRPr lang="en-IN" sz="1400" i="1">
+              <a:solidFill>
+                <a:srgbClr val="444444"/>
+              </a:solidFill>
+            </a:endParaRPr>
+          </a:p>
+        </p:txBody>
+      </p:sp>
+    </p:spTree>
+    <p:extLst>
+      <p:ext uri="{BB962C8B-B14F-4D97-AF65-F5344CB8AC3E}">
+        <p14:creationId xmlns:p14="http://schemas.microsoft.com/office/powerpoint/2010/main" val="2007529065"/>
+      </p:ext>
+    </p:extLst>
+  </p:cSld>
+  <p:clrMapOvr>
+    <a:masterClrMapping/>
+  </p:clrMapOvr>
+</p:sld>
+</file>
+
+<file path=ppt/slides/slide27.xml><?xml version="1.0" encoding="utf-8"?>
+<p:sld xmlns:a="http://schemas.openxmlformats.org/drawingml/2006/main" xmlns:r="http://schemas.openxmlformats.org/officeDocument/2006/relationships" xmlns:p="http://schemas.openxmlformats.org/presentationml/2006/main">
+  <p:cSld>
+    <p:spTree>
+      <p:nvGrpSpPr>
+        <p:cNvPr id="1" name=""/>
+        <p:cNvGrpSpPr/>
+        <p:nvPr/>
+      </p:nvGrpSpPr>
+      <p:grpSpPr>
+        <a:xfrm>
+          <a:off x="0" y="0"/>
+          <a:ext cx="0" cy="0"/>
+          <a:chOff x="0" y="0"/>
+          <a:chExt cx="0" cy="0"/>
+        </a:xfrm>
+      </p:grpSpPr>
+      <p:sp>
+        <p:nvSpPr>
+          <p:cNvPr id="2" name="Title 1"/>
+          <p:cNvSpPr>
+            <a:spLocks noGrp="1"/>
+          </p:cNvSpPr>
+          <p:nvPr>
+            <p:ph type="title"/>
+          </p:nvPr>
+        </p:nvSpPr>
+        <p:spPr/>
+        <p:txBody>
+          <a:bodyPr/>
+          <a:lstStyle/>
+          <a:p>
+            <a:r>
+              <a:t>Method Overloading</a:t>
+            </a:r>
+          </a:p>
+        </p:txBody>
+      </p:sp>
+      <p:sp>
+        <p:nvSpPr>
+          <p:cNvPr id="3" name="Content Placeholder 2"/>
+          <p:cNvSpPr>
+            <a:spLocks noGrp="1"/>
+          </p:cNvSpPr>
+          <p:nvPr>
+            <p:ph idx="1"/>
+          </p:nvPr>
+        </p:nvSpPr>
+        <p:spPr/>
+        <p:txBody>
+          <a:bodyPr/>
+          <a:lstStyle/>
+          <a:p>
+            <a:r>
+              <a:rPr lang="en-US" dirty="0"/>
+              <a:t>Same method name, different parameter list — in the same class</a:t>
+            </a:r>
+          </a:p>
+          <a:p>
+            <a:r>
+              <a:rPr lang="en-US" dirty="0"/>
+              <a:t>Differ by number, type, or order of parameters (NOT by return type alone)</a:t>
+            </a:r>
+          </a:p>
+          <a:p>
+            <a:r>
+              <a:rPr lang="en-US" dirty="0"/>
+              <a:t>Compiler picks the right overload at compile time</a:t>
+            </a:r>
+          </a:p>
+          <a:p>
+            <a:r>
+              <a:rPr lang="en-US" b="1" dirty="0"/>
+              <a:t>Example</a:t>
+            </a:r>
+          </a:p>
+          <a:p>
+            <a:pPr>
+              <a:buNone/>
+            </a:pPr>
+            <a:r>
+              <a:rPr lang="en-US" sz="1400" dirty="0">
+                <a:latin typeface="Consolas"/>
+              </a:rPr>
+              <a:t>public int Add(int a, int b) =&gt; a + b;</a:t>
+            </a:r>
+          </a:p>
+          <a:p>
+            <a:pPr>
+              <a:buNone/>
+            </a:pPr>
+            <a:r>
+              <a:rPr lang="en-US" sz="1400" dirty="0">
+                <a:latin typeface="Consolas"/>
+              </a:rPr>
+              <a:t>public double Add(double a, double b) =&gt; a + b;</a:t>
+            </a:r>
+          </a:p>
+          <a:p>
+            <a:pPr>
+              <a:buNone/>
+            </a:pPr>
+            <a:r>
+              <a:rPr lang="en-US" sz="1400" dirty="0">
+                <a:latin typeface="Consolas"/>
+              </a:rPr>
+              <a:t>public int Add(int a, int b, int c) =&gt; a + b + c;</a:t>
+            </a:r>
+          </a:p>
+          <a:p>
+            <a:r>
+              <a:rPr lang="en-US" dirty="0"/>
+              <a:t>Improves readability — one logical operation, multiple parameter shapes</a:t>
+            </a:r>
+          </a:p>
+        </p:txBody>
+      </p:sp>
+    </p:spTree>
+    <p:extLst>
+      <p:ext uri="{BB962C8B-B14F-4D97-AF65-F5344CB8AC3E}">
+        <p14:creationId xmlns:p14="http://schemas.microsoft.com/office/powerpoint/2010/main" val="3988680147"/>
+      </p:ext>
+    </p:extLst>
+  </p:cSld>
+  <p:clrMapOvr>
+    <a:masterClrMapping/>
+  </p:clrMapOvr>
+</p:sld>
+</file>
+
+<file path=ppt/slides/slide28.xml><?xml version="1.0" encoding="utf-8"?>
+<p:sld xmlns:a="http://schemas.openxmlformats.org/drawingml/2006/main" xmlns:r="http://schemas.openxmlformats.org/officeDocument/2006/relationships" xmlns:p="http://schemas.openxmlformats.org/presentationml/2006/main">
+  <p:cSld>
+    <p:spTree>
+      <p:nvGrpSpPr>
+        <p:cNvPr id="1" name=""/>
+        <p:cNvGrpSpPr/>
+        <p:nvPr/>
+      </p:nvGrpSpPr>
+      <p:grpSpPr>
+        <a:xfrm>
+          <a:off x="0" y="0"/>
+          <a:ext cx="0" cy="0"/>
+          <a:chOff x="0" y="0"/>
+          <a:chExt cx="0" cy="0"/>
+        </a:xfrm>
+      </p:grpSpPr>
+      <p:sp>
+        <p:nvSpPr>
+          <p:cNvPr id="2" name="Title 1"/>
+          <p:cNvSpPr>
+            <a:spLocks noGrp="1"/>
+          </p:cNvSpPr>
+          <p:nvPr>
+            <p:ph type="title"/>
+          </p:nvPr>
+        </p:nvSpPr>
+        <p:spPr/>
+        <p:txBody>
+          <a:bodyPr/>
+          <a:lstStyle/>
+          <a:p>
+            <a:r>
+              <a:t>Operator Overloading</a:t>
+            </a:r>
+          </a:p>
+        </p:txBody>
+      </p:sp>
+      <p:sp>
+        <p:nvSpPr>
+          <p:cNvPr id="3" name="Content Placeholder 2"/>
+          <p:cNvSpPr>
+            <a:spLocks noGrp="1"/>
+          </p:cNvSpPr>
+          <p:nvPr>
+            <p:ph idx="1"/>
+          </p:nvPr>
+        </p:nvSpPr>
+        <p:spPr/>
+        <p:txBody>
+          <a:bodyPr/>
+          <a:lstStyle/>
+          <a:p>
+            <a:r>
+              <a:rPr lang="en-US" dirty="0"/>
+              <a:t>Give built-in operators (+, -, ==, &gt;) custom meaning for your types</a:t>
+            </a:r>
+          </a:p>
+          <a:p>
+            <a:r>
+              <a:rPr lang="en-US" dirty="0"/>
+              <a:t>Declared with the keyword</a:t>
+            </a:r>
+            <a:r>
+              <a:rPr lang="en-US" dirty="0">
+                <a:latin typeface="Consolas"/>
+              </a:rPr>
+              <a:t> operator </a:t>
+            </a:r>
+            <a:r>
+              <a:rPr lang="en-US" dirty="0"/>
+              <a:t>— must be public and static</a:t>
+            </a:r>
+          </a:p>
+          <a:p>
+            <a:r>
+              <a:rPr lang="en-US" dirty="0"/>
+              <a:t>Common candidates: Vector, Money, Complex, Matrix, Distance</a:t>
+            </a:r>
+          </a:p>
+          <a:p>
+            <a:r>
+              <a:rPr lang="en-US" b="1" dirty="0"/>
+              <a:t>Example</a:t>
+            </a:r>
+          </a:p>
+          <a:p>
+            <a:pPr>
+              <a:buNone/>
+            </a:pPr>
+            <a:r>
+              <a:rPr lang="en-US" sz="1400" dirty="0">
+                <a:latin typeface="Consolas"/>
+              </a:rPr>
+              <a:t>public static Vector operator +(Vector a, Vector b)</a:t>
+            </a:r>
+          </a:p>
+          <a:p>
+            <a:pPr>
+              <a:buNone/>
+            </a:pPr>
+            <a:r>
+              <a:rPr lang="en-US" sz="1400" dirty="0">
+                <a:latin typeface="Consolas"/>
+              </a:rPr>
+              <a:t>    =&gt; new Vector(a.X + b.X, a.Y + b.Y);</a:t>
+            </a:r>
+          </a:p>
+          <a:p>
+            <a:r>
+              <a:rPr lang="en-US" dirty="0"/>
+              <a:t>If you overload ==, also overload != (and override Equals / GetHashCode)</a:t>
+            </a:r>
+          </a:p>
+          <a:p>
+            <a:r>
+              <a:rPr lang="en-US" dirty="0"/>
+              <a:t>Use sparingly — overloaded operators must behave like their built-in counterparts</a:t>
+            </a:r>
+          </a:p>
+        </p:txBody>
+      </p:sp>
+    </p:spTree>
+    <p:extLst>
+      <p:ext uri="{BB962C8B-B14F-4D97-AF65-F5344CB8AC3E}">
+        <p14:creationId xmlns:p14="http://schemas.microsoft.com/office/powerpoint/2010/main" val="3899245735"/>
+      </p:ext>
+    </p:extLst>
+  </p:cSld>
+  <p:clrMapOvr>
+    <a:masterClrMapping/>
+  </p:clrMapOvr>
+</p:sld>
+</file>
+
+<file path=ppt/slides/slide29.xml><?xml version="1.0" encoding="utf-8"?>
+<p:sld xmlns:a="http://schemas.openxmlformats.org/drawingml/2006/main" xmlns:r="http://schemas.openxmlformats.org/officeDocument/2006/relationships" xmlns:p="http://schemas.openxmlformats.org/presentationml/2006/main">
+  <p:cSld>
+    <p:spTree>
+      <p:nvGrpSpPr>
+        <p:cNvPr id="1" name=""/>
+        <p:cNvGrpSpPr/>
+        <p:nvPr/>
+      </p:nvGrpSpPr>
+      <p:grpSpPr>
+        <a:xfrm>
+          <a:off x="0" y="0"/>
+          <a:ext cx="0" cy="0"/>
+          <a:chOff x="0" y="0"/>
+          <a:chExt cx="0" cy="0"/>
+        </a:xfrm>
+      </p:grpSpPr>
+      <p:sp>
+        <p:nvSpPr>
+          <p:cNvPr id="2" name="Title 1">
+            <a:extLst>
+              <a:ext uri="{FF2B5EF4-FFF2-40B4-BE49-F238E27FC236}">
+                <a16:creationId xmlns:a16="http://schemas.microsoft.com/office/drawing/2014/main" id="{1D0F4FC2-EDE3-2F6A-3BB7-F4ABBA1898CC}"/>
+              </a:ext>
+            </a:extLst>
+          </p:cNvPr>
+          <p:cNvSpPr>
+            <a:spLocks noGrp="1"/>
+          </p:cNvSpPr>
+          <p:nvPr>
+            <p:ph type="title"/>
+          </p:nvPr>
+        </p:nvSpPr>
+        <p:spPr/>
+        <p:txBody>
+          <a:bodyPr/>
+          <a:lstStyle/>
+          <a:p>
+            <a:r>
+              <a:rPr lang="en-US" dirty="0"/>
+              <a:t>Lab 6.1 - Calculator with Overloads</a:t>
+            </a:r>
+          </a:p>
+        </p:txBody>
+      </p:sp>
+      <p:sp>
+        <p:nvSpPr>
+          <p:cNvPr id="3" name="Content Placeholder 2">
+            <a:extLst>
+              <a:ext uri="{FF2B5EF4-FFF2-40B4-BE49-F238E27FC236}">
+                <a16:creationId xmlns:a16="http://schemas.microsoft.com/office/drawing/2014/main" id="{F992BA5E-56FD-6ED1-D69F-B8B34A9A364E}"/>
+              </a:ext>
+            </a:extLst>
+          </p:cNvPr>
+          <p:cNvSpPr>
+            <a:spLocks noGrp="1"/>
+          </p:cNvSpPr>
+          <p:nvPr>
+            <p:ph idx="1"/>
+          </p:nvPr>
+        </p:nvSpPr>
+        <p:spPr/>
+        <p:txBody>
+          <a:bodyPr/>
+          <a:lstStyle/>
+          <a:p>
+            <a:pPr>
+              <a:buNone/>
+            </a:pPr>
+            <a:r>
+              <a:rPr lang="en-US" b="1" dirty="0"/>
+              <a:t>Goal:</a:t>
+            </a:r>
+            <a:r>
+              <a:rPr lang="en-US" dirty="0"/>
+              <a:t> practice compile-time polymorphism with method overloading.</a:t>
+            </a:r>
+          </a:p>
+          <a:p>
+            <a:pPr>
+              <a:buNone/>
+            </a:pPr>
+            <a:r>
+              <a:rPr lang="en-US" b="1" dirty="0"/>
+              <a:t>Steps:</a:t>
+            </a:r>
+          </a:p>
+          <a:p>
+            <a:pPr marL="285750" indent="-285750">
+              <a:buFont typeface="+mj-lt"/>
+              <a:buAutoNum type="arabicPeriod"/>
+            </a:pPr>
+            <a:r>
+              <a:rPr lang="en-US" dirty="0"/>
+              <a:t>Create a </a:t>
+            </a:r>
+            <a:r>
+              <a:rPr lang="en-US" dirty="0">
+                <a:latin typeface="Consolas"/>
+              </a:rPr>
+              <a:t>Calculator</a:t>
+            </a:r>
+            <a:r>
+              <a:rPr lang="en-US" dirty="0"/>
+              <a:t> class.</a:t>
+            </a:r>
+          </a:p>
+          <a:p>
+            <a:pPr marL="285750" indent="-285750">
+              <a:buFont typeface="+mj-lt"/>
+              <a:buAutoNum type="arabicPeriod"/>
+            </a:pPr>
+            <a:r>
+              <a:rPr lang="en-US" dirty="0"/>
+              <a:t>Add three overloads of </a:t>
+            </a:r>
+            <a:r>
+              <a:rPr lang="en-US" dirty="0">
+                <a:latin typeface="Consolas"/>
+              </a:rPr>
+              <a:t>Add</a:t>
+            </a:r>
+            <a:r>
+              <a:rPr lang="en-US" dirty="0"/>
+              <a:t>: </a:t>
+            </a:r>
+            <a:r>
+              <a:rPr lang="en-US" dirty="0">
+                <a:latin typeface="Consolas"/>
+              </a:rPr>
+              <a:t>(int, int)</a:t>
+            </a:r>
+            <a:r>
+              <a:rPr lang="en-US" dirty="0"/>
+              <a:t>, </a:t>
+            </a:r>
+            <a:r>
+              <a:rPr lang="en-US" dirty="0">
+                <a:latin typeface="Consolas"/>
+              </a:rPr>
+              <a:t>(double, double)</a:t>
+            </a:r>
+            <a:r>
+              <a:rPr lang="en-US" dirty="0"/>
+              <a:t>, </a:t>
+            </a:r>
+            <a:r>
+              <a:rPr lang="en-US" dirty="0">
+                <a:latin typeface="Consolas"/>
+              </a:rPr>
+              <a:t>(int, int, int)</a:t>
+            </a:r>
+          </a:p>
+          <a:p>
+            <a:pPr marL="285750" indent="-285750">
+              <a:buFont typeface="+mj-lt"/>
+              <a:buAutoNum type="arabicPeriod"/>
+            </a:pPr>
+            <a:r>
+              <a:rPr lang="en-US" dirty="0"/>
+              <a:t>Call all three from </a:t>
+            </a:r>
+            <a:r>
+              <a:rPr lang="en-US" dirty="0">
+                <a:latin typeface="Consolas"/>
+              </a:rPr>
+              <a:t>Main</a:t>
+            </a:r>
+            <a:r>
+              <a:rPr lang="en-US" dirty="0"/>
+              <a:t>; print which overload was selected.</a:t>
+            </a:r>
+          </a:p>
+          <a:p>
+            <a:pPr marL="285750" indent="-285750">
+              <a:buFont typeface="+mj-lt"/>
+              <a:buAutoNum type="arabicPeriod"/>
+            </a:pPr>
+            <a:r>
+              <a:rPr lang="en-US" dirty="0"/>
+              <a:t>Try </a:t>
+            </a:r>
+            <a:r>
+              <a:rPr lang="en-US" dirty="0">
+                <a:latin typeface="Consolas"/>
+              </a:rPr>
+              <a:t>Add(1, 2.5)</a:t>
+            </a:r>
+            <a:r>
+              <a:rPr lang="en-US" dirty="0"/>
+              <a:t> — observe implicit conversion to the </a:t>
+            </a:r>
+            <a:r>
+              <a:rPr lang="en-US" dirty="0">
+                <a:latin typeface="Consolas"/>
+              </a:rPr>
+              <a:t>double</a:t>
+            </a:r>
+            <a:r>
+              <a:rPr lang="en-US" dirty="0"/>
+              <a:t> overload.</a:t>
+            </a:r>
+          </a:p>
+          <a:p>
+            <a:pPr>
+              <a:buNone/>
+            </a:pPr>
+            <a:r>
+              <a:rPr lang="en-US" b="1" dirty="0"/>
+              <a:t>Stretch:</a:t>
+            </a:r>
+            <a:r>
+              <a:rPr lang="en-US" dirty="0"/>
+              <a:t> add overloaded </a:t>
+            </a:r>
+            <a:r>
+              <a:rPr lang="en-US" dirty="0">
+                <a:latin typeface="Consolas"/>
+              </a:rPr>
+              <a:t>Subtract</a:t>
+            </a:r>
+            <a:r>
+              <a:rPr lang="en-US" dirty="0"/>
+              <a:t>, </a:t>
+            </a:r>
+            <a:r>
+              <a:rPr lang="en-US" dirty="0">
+                <a:latin typeface="Consolas"/>
+              </a:rPr>
+              <a:t>Multiply</a:t>
+            </a:r>
+            <a:r>
+              <a:rPr lang="en-US" dirty="0"/>
+              <a:t>, and a params-array overload </a:t>
+            </a:r>
+            <a:r>
+              <a:rPr lang="en-US" dirty="0">
+                <a:latin typeface="Consolas"/>
+              </a:rPr>
+              <a:t>Add(params int[] nums)</a:t>
+            </a:r>
+            <a:r>
+              <a:rPr lang="en-US" dirty="0"/>
+              <a:t>.</a:t>
+            </a:r>
+          </a:p>
+        </p:txBody>
+      </p:sp>
+    </p:spTree>
+    <p:extLst>
+      <p:ext uri="{BB962C8B-B14F-4D97-AF65-F5344CB8AC3E}">
+        <p14:creationId xmlns:p14="http://schemas.microsoft.com/office/powerpoint/2010/main" val="1104605588"/>
+      </p:ext>
+    </p:extLst>
   </p:cSld>
   <p:clrMapOvr>
     <a:masterClrMapping/>
@@ -17728,27 +20459,103 @@
           <a:lstStyle/>
           <a:p>
             <a:r>
-              <a:t>class Person {</a:t>
-            </a:r>
-          </a:p>
-          <a:p>
-            <a:r>
-              <a:t> string name;</a:t>
-            </a:r>
-          </a:p>
-          <a:p>
-            <a:r>
-              <a:t> int age;</a:t>
-            </a:r>
-          </a:p>
-          <a:p>
-            <a:r>
+              <a:t>Use the </a:t>
+            </a:r>
+            <a:r>
+              <a:rPr lang="en-US" b="1" dirty="0">
+                <a:latin typeface="Consolas"/>
+              </a:rPr>
+              <a:t>class</a:t>
+            </a:r>
+            <a:r>
+              <a:t> keyword followed by a name</a:t>
+            </a:r>
+          </a:p>
+          <a:p>
+            <a:r>
+              <a:t>Body contains fields, properties, methods, constructors</a:t>
+            </a:r>
+          </a:p>
+          <a:p>
+            <a:pPr>
+              <a:buNone/>
+            </a:pPr>
+            <a:endParaRPr lang="en-US"/>
+          </a:p>
+          <a:p>
+            <a:pPr>
+              <a:buNone/>
+            </a:pPr>
+            <a:r>
+              <a:rPr lang="en-US" sz="1600" dirty="0">
+                <a:latin typeface="Consolas"/>
+              </a:rPr>
+              <a:t>public class Person</a:t>
+            </a:r>
+          </a:p>
+          <a:p>
+            <a:pPr>
+              <a:buNone/>
+            </a:pPr>
+            <a:r>
+              <a:rPr lang="en-US" sz="1600" dirty="0">
+                <a:latin typeface="Consolas"/>
+              </a:rPr>
+              <a:t>{</a:t>
+            </a:r>
+          </a:p>
+          <a:p>
+            <a:pPr>
+              <a:buNone/>
+            </a:pPr>
+            <a:r>
+              <a:rPr lang="en-US" sz="1600" dirty="0">
+                <a:latin typeface="Consolas"/>
+              </a:rPr>
+              <a:t>    private string name;</a:t>
+            </a:r>
+          </a:p>
+          <a:p>
+            <a:pPr>
+              <a:buNone/>
+            </a:pPr>
+            <a:r>
+              <a:rPr lang="en-US" sz="1600" dirty="0">
+                <a:latin typeface="Consolas"/>
+              </a:rPr>
+              <a:t>    private int age;</a:t>
+            </a:r>
+          </a:p>
+          <a:p>
+            <a:pPr>
+              <a:buNone/>
+            </a:pPr>
+            <a:r>
+              <a:rPr lang="en-US" sz="1600" dirty="0">
+                <a:latin typeface="Consolas"/>
+              </a:rPr>
+              <a:t>    public void Greet() { }</a:t>
+            </a:r>
+          </a:p>
+          <a:p>
+            <a:pPr>
+              <a:buNone/>
+            </a:pPr>
+            <a:r>
+              <a:rPr lang="en-US" sz="1600" dirty="0">
+                <a:latin typeface="Consolas"/>
+              </a:rPr>
               <a:t>}</a:t>
             </a:r>
           </a:p>
         </p:txBody>
       </p:sp>
     </p:spTree>
+    <p:extLst>
+      <p:ext uri="{BB962C8B-B14F-4D97-AF65-F5344CB8AC3E}">
+        <p14:creationId xmlns:p14="http://schemas.microsoft.com/office/powerpoint/2010/main" val="557849274"/>
+      </p:ext>
+    </p:extLst>
   </p:cSld>
   <p:clrMapOvr>
     <a:masterClrMapping/>
@@ -17756,7 +20563,7 @@
 </p:sld>
 </file>
 
-<file path=ppt/slides/slide4.xml><?xml version="1.0" encoding="utf-8"?>
+<file path=ppt/slides/slide30.xml><?xml version="1.0" encoding="utf-8"?>
 <p:sld xmlns:a="http://schemas.openxmlformats.org/drawingml/2006/main" xmlns:r="http://schemas.openxmlformats.org/officeDocument/2006/relationships" xmlns:p="http://schemas.openxmlformats.org/presentationml/2006/main">
   <p:cSld>
     <p:spTree>
@@ -17789,7 +20596,7 @@
           <a:lstStyle/>
           <a:p>
             <a:r>
-              <a:t>Creating Objects</a:t>
+              <a:t>Runtime Polymorphism</a:t>
             </a:r>
           </a:p>
         </p:txBody>
@@ -17810,17 +20617,753 @@
           <a:lstStyle/>
           <a:p>
             <a:r>
-              <a:t>Person p = new Person();</a:t>
-            </a:r>
-          </a:p>
-          <a:p>
-            <a:r>
-              <a:t>p.name = "John";</a:t>
+              <a:rPr lang="en-US" dirty="0"/>
+              <a:t>Same method signature, different behavior in derived classes</a:t>
+            </a:r>
+          </a:p>
+          <a:p>
+            <a:r>
+              <a:rPr lang="en-US" dirty="0"/>
+              <a:t>Mark the base method </a:t>
+            </a:r>
+            <a:r>
+              <a:rPr lang="en-US" dirty="0">
+                <a:latin typeface="Consolas"/>
+              </a:rPr>
+              <a:t>virtual</a:t>
+            </a:r>
+            <a:r>
+              <a:rPr lang="en-US" dirty="0"/>
+              <a:t>; mark the derived one </a:t>
+            </a:r>
+            <a:r>
+              <a:rPr lang="en-US" dirty="0">
+                <a:latin typeface="Consolas"/>
+              </a:rPr>
+              <a:t>override</a:t>
+            </a:r>
+          </a:p>
+          <a:p>
+            <a:r>
+              <a:rPr lang="en-US" dirty="0"/>
+              <a:t>The actual method called depends on the object's runtime type, not the reference</a:t>
+            </a:r>
+          </a:p>
+          <a:p>
+            <a:r>
+              <a:rPr lang="en-US" b="1" dirty="0"/>
+              <a:t>Example</a:t>
+            </a:r>
+          </a:p>
+          <a:p>
+            <a:pPr>
+              <a:buNone/>
+            </a:pPr>
+            <a:r>
+              <a:rPr lang="en-US" sz="1400" dirty="0">
+                <a:latin typeface="Consolas"/>
+              </a:rPr>
+              <a:t>class Shape  { public virtual double Area() =&gt; 0; }</a:t>
+            </a:r>
+          </a:p>
+          <a:p>
+            <a:pPr>
+              <a:buNone/>
+            </a:pPr>
+            <a:r>
+              <a:rPr lang="en-US" sz="1400" dirty="0">
+                <a:latin typeface="Consolas"/>
+              </a:rPr>
+              <a:t>class Circle : Shape { public override double Area() =&gt; Math.PI * R * R; }</a:t>
+            </a:r>
+          </a:p>
+          <a:p>
+            <a:pPr>
+              <a:buNone/>
+            </a:pPr>
+            <a:r>
+              <a:rPr lang="en-US" sz="1400" dirty="0">
+                <a:latin typeface="Consolas"/>
+              </a:rPr>
+              <a:t>Shape s = new Circle(); s.Area();  // runs Circle.Area</a:t>
+            </a:r>
+          </a:p>
+          <a:p>
+            <a:r>
+              <a:rPr lang="en-US" dirty="0"/>
+              <a:t>Use </a:t>
+            </a:r>
+            <a:r>
+              <a:rPr lang="en-US" dirty="0">
+                <a:latin typeface="Consolas"/>
+              </a:rPr>
+              <a:t>abstract</a:t>
+            </a:r>
+            <a:r>
+              <a:rPr lang="en-US" dirty="0"/>
+              <a:t> when the base has no meaningful default</a:t>
             </a:r>
           </a:p>
         </p:txBody>
       </p:sp>
     </p:spTree>
+    <p:extLst>
+      <p:ext uri="{BB962C8B-B14F-4D97-AF65-F5344CB8AC3E}">
+        <p14:creationId xmlns:p14="http://schemas.microsoft.com/office/powerpoint/2010/main" val="1764806702"/>
+      </p:ext>
+    </p:extLst>
+  </p:cSld>
+  <p:clrMapOvr>
+    <a:masterClrMapping/>
+  </p:clrMapOvr>
+</p:sld>
+</file>
+
+<file path=ppt/slides/slide31.xml><?xml version="1.0" encoding="utf-8"?>
+<p:sld xmlns:a="http://schemas.openxmlformats.org/drawingml/2006/main" xmlns:r="http://schemas.openxmlformats.org/officeDocument/2006/relationships" xmlns:p="http://schemas.openxmlformats.org/presentationml/2006/main">
+  <p:cSld>
+    <p:spTree>
+      <p:nvGrpSpPr>
+        <p:cNvPr id="1" name=""/>
+        <p:cNvGrpSpPr/>
+        <p:nvPr/>
+      </p:nvGrpSpPr>
+      <p:grpSpPr>
+        <a:xfrm>
+          <a:off x="0" y="0"/>
+          <a:ext cx="0" cy="0"/>
+          <a:chOff x="0" y="0"/>
+          <a:chExt cx="0" cy="0"/>
+        </a:xfrm>
+      </p:grpSpPr>
+      <p:sp>
+        <p:nvSpPr>
+          <p:cNvPr id="2" name="Title 1">
+            <a:extLst>
+              <a:ext uri="{FF2B5EF4-FFF2-40B4-BE49-F238E27FC236}">
+                <a16:creationId xmlns:a16="http://schemas.microsoft.com/office/drawing/2014/main" id="{B6A56BDC-4DBE-E603-65A3-41F588609037}"/>
+              </a:ext>
+            </a:extLst>
+          </p:cNvPr>
+          <p:cNvSpPr>
+            <a:spLocks noGrp="1"/>
+          </p:cNvSpPr>
+          <p:nvPr>
+            <p:ph type="title"/>
+          </p:nvPr>
+        </p:nvSpPr>
+        <p:spPr/>
+        <p:txBody>
+          <a:bodyPr/>
+          <a:lstStyle/>
+          <a:p>
+            <a:r>
+              <a:rPr lang="en-US"/>
+              <a:t>virtual vs override vs new</a:t>
+            </a:r>
+            <a:endParaRPr lang="en-IN"/>
+          </a:p>
+        </p:txBody>
+      </p:sp>
+      <p:sp>
+        <p:nvSpPr>
+          <p:cNvPr id="3" name="Content Placeholder 2">
+            <a:extLst>
+              <a:ext uri="{FF2B5EF4-FFF2-40B4-BE49-F238E27FC236}">
+                <a16:creationId xmlns:a16="http://schemas.microsoft.com/office/drawing/2014/main" id="{CCFF2BB1-EB9E-D6A1-E4F1-755F1B52F3C5}"/>
+              </a:ext>
+            </a:extLst>
+          </p:cNvPr>
+          <p:cNvSpPr>
+            <a:spLocks noGrp="1"/>
+          </p:cNvSpPr>
+          <p:nvPr>
+            <p:ph idx="1"/>
+          </p:nvPr>
+        </p:nvSpPr>
+        <p:spPr/>
+        <p:txBody>
+          <a:bodyPr/>
+          <a:lstStyle/>
+          <a:p>
+            <a:r>
+              <a:rPr lang="en-US" b="1" dirty="0">
+                <a:latin typeface="Consolas"/>
+              </a:rPr>
+              <a:t>virtual</a:t>
+            </a:r>
+            <a:r>
+              <a:rPr lang="en-US" dirty="0"/>
+              <a:t> — marks a base method as overridable; runtime picks the most-derived version.</a:t>
+            </a:r>
+          </a:p>
+          <a:p>
+            <a:r>
+              <a:rPr lang="en-US" b="1" dirty="0">
+                <a:latin typeface="Consolas"/>
+              </a:rPr>
+              <a:t>override</a:t>
+            </a:r>
+            <a:r>
+              <a:rPr lang="en-US" dirty="0"/>
+              <a:t> — replaces a base virtual/abstract method; participates in dynamic dispatch.</a:t>
+            </a:r>
+          </a:p>
+          <a:p>
+            <a:r>
+              <a:rPr lang="en-US" b="1" dirty="0">
+                <a:latin typeface="Consolas"/>
+              </a:rPr>
+              <a:t>new</a:t>
+            </a:r>
+            <a:r>
+              <a:rPr lang="en-US" dirty="0"/>
+              <a:t> — hides the base method; which one runs depends on the </a:t>
+            </a:r>
+            <a:r>
+              <a:rPr lang="en-US" b="1" dirty="0"/>
+              <a:t>variable type</a:t>
+            </a:r>
+            <a:r>
+              <a:rPr lang="en-US" dirty="0"/>
+              <a:t>, not the object.</a:t>
+            </a:r>
+          </a:p>
+          <a:p>
+            <a:r>
+              <a:rPr lang="en-US" dirty="0"/>
+              <a:t>Override is polymorphic; new is not.</a:t>
+            </a:r>
+          </a:p>
+          <a:p>
+            <a:r>
+              <a:rPr lang="en-US" dirty="0"/>
+              <a:t>Without </a:t>
+            </a:r>
+            <a:r>
+              <a:rPr lang="en-US" dirty="0">
+                <a:latin typeface="Consolas"/>
+              </a:rPr>
+              <a:t>virtual</a:t>
+            </a:r>
+            <a:r>
+              <a:rPr lang="en-US" dirty="0"/>
+              <a:t>, derived classes can only hide (with </a:t>
+            </a:r>
+            <a:r>
+              <a:rPr lang="en-US" dirty="0">
+                <a:latin typeface="Consolas"/>
+              </a:rPr>
+              <a:t>new</a:t>
+            </a:r>
+            <a:r>
+              <a:rPr lang="en-US" dirty="0"/>
+              <a:t>), not override.</a:t>
+            </a:r>
+          </a:p>
+          <a:p>
+            <a:r>
+              <a:rPr lang="en-US" dirty="0"/>
+              <a:t>Always prefer </a:t>
+            </a:r>
+            <a:r>
+              <a:rPr lang="en-US" dirty="0">
+                <a:latin typeface="Consolas"/>
+              </a:rPr>
+              <a:t>override</a:t>
+            </a:r>
+            <a:r>
+              <a:rPr lang="en-US" dirty="0"/>
+              <a:t> over </a:t>
+            </a:r>
+            <a:r>
+              <a:rPr lang="en-US" dirty="0">
+                <a:latin typeface="Consolas"/>
+              </a:rPr>
+              <a:t>new</a:t>
+            </a:r>
+            <a:r>
+              <a:rPr lang="en-US" dirty="0"/>
+              <a:t> unless you genuinely want to hide.</a:t>
+            </a:r>
+          </a:p>
+        </p:txBody>
+      </p:sp>
+    </p:spTree>
+    <p:extLst>
+      <p:ext uri="{BB962C8B-B14F-4D97-AF65-F5344CB8AC3E}">
+        <p14:creationId xmlns:p14="http://schemas.microsoft.com/office/powerpoint/2010/main" val="2193652889"/>
+      </p:ext>
+    </p:extLst>
+  </p:cSld>
+  <p:clrMapOvr>
+    <a:masterClrMapping/>
+  </p:clrMapOvr>
+</p:sld>
+</file>
+
+<file path=ppt/slides/slide32.xml><?xml version="1.0" encoding="utf-8"?>
+<p:sld xmlns:a="http://schemas.openxmlformats.org/drawingml/2006/main" xmlns:r="http://schemas.openxmlformats.org/officeDocument/2006/relationships" xmlns:p="http://schemas.openxmlformats.org/presentationml/2006/main">
+  <p:cSld>
+    <p:spTree>
+      <p:nvGrpSpPr>
+        <p:cNvPr id="1" name=""/>
+        <p:cNvGrpSpPr/>
+        <p:nvPr/>
+      </p:nvGrpSpPr>
+      <p:grpSpPr>
+        <a:xfrm>
+          <a:off x="0" y="0"/>
+          <a:ext cx="0" cy="0"/>
+          <a:chOff x="0" y="0"/>
+          <a:chExt cx="0" cy="0"/>
+        </a:xfrm>
+      </p:grpSpPr>
+      <p:sp>
+        <p:nvSpPr>
+          <p:cNvPr id="2" name="Title 1"/>
+          <p:cNvSpPr>
+            <a:spLocks noGrp="1"/>
+          </p:cNvSpPr>
+          <p:nvPr>
+            <p:ph type="title"/>
+          </p:nvPr>
+        </p:nvSpPr>
+        <p:spPr/>
+        <p:txBody>
+          <a:bodyPr/>
+          <a:lstStyle/>
+          <a:p>
+            <a:r>
+              <a:t>Static vs Dynamic</a:t>
+            </a:r>
+          </a:p>
+        </p:txBody>
+      </p:sp>
+      <p:sp>
+        <p:nvSpPr>
+          <p:cNvPr id="3" name="Content Placeholder 2"/>
+          <p:cNvSpPr>
+            <a:spLocks noGrp="1"/>
+          </p:cNvSpPr>
+          <p:nvPr>
+            <p:ph idx="1"/>
+          </p:nvPr>
+        </p:nvSpPr>
+        <p:spPr/>
+        <p:txBody>
+          <a:bodyPr/>
+          <a:lstStyle/>
+          <a:p>
+            <a:r>
+              <a:rPr lang="en-US" b="1" dirty="0"/>
+              <a:t>Static (compile-time)</a:t>
+            </a:r>
+          </a:p>
+          <a:p>
+            <a:pPr lvl="1"/>
+            <a:r>
+              <a:rPr lang="en-US" dirty="0"/>
+              <a:t>Method resolved by the compiler — fixed at build time</a:t>
+            </a:r>
+          </a:p>
+          <a:p>
+            <a:pPr lvl="1"/>
+            <a:r>
+              <a:rPr lang="en-US" dirty="0"/>
+              <a:t>Examples: overloaded methods, overloaded operators</a:t>
+            </a:r>
+          </a:p>
+          <a:p>
+            <a:pPr lvl="1"/>
+            <a:r>
+              <a:rPr lang="en-US" dirty="0"/>
+              <a:t>Faster, type-checked early</a:t>
+            </a:r>
+          </a:p>
+          <a:p>
+            <a:r>
+              <a:rPr lang="en-US" b="1" dirty="0"/>
+              <a:t>Dynamic (run-time)</a:t>
+            </a:r>
+          </a:p>
+          <a:p>
+            <a:pPr lvl="1"/>
+            <a:r>
+              <a:rPr lang="en-US" dirty="0"/>
+              <a:t>Method resolved by the CLR using the object's actual type</a:t>
+            </a:r>
+          </a:p>
+          <a:p>
+            <a:pPr lvl="1"/>
+            <a:r>
+              <a:rPr lang="en-US" dirty="0"/>
+              <a:t>Examples: virtual / override, abstract methods, interfaces</a:t>
+            </a:r>
+          </a:p>
+          <a:p>
+            <a:pPr lvl="1"/>
+            <a:r>
+              <a:rPr lang="en-US" dirty="0"/>
+              <a:t>Slight overhead from virtual dispatch — enables true extensibility</a:t>
+            </a:r>
+          </a:p>
+          <a:p>
+            <a:r>
+              <a:rPr lang="en-US" b="1" dirty="0"/>
+              <a:t>Rule of thumb</a:t>
+            </a:r>
+            <a:r>
+              <a:rPr lang="en-US" dirty="0"/>
+              <a:t>: use overloading for convenience, overriding for behavior swap</a:t>
+            </a:r>
+          </a:p>
+        </p:txBody>
+      </p:sp>
+    </p:spTree>
+    <p:extLst>
+      <p:ext uri="{BB962C8B-B14F-4D97-AF65-F5344CB8AC3E}">
+        <p14:creationId xmlns:p14="http://schemas.microsoft.com/office/powerpoint/2010/main" val="563965199"/>
+      </p:ext>
+    </p:extLst>
+  </p:cSld>
+  <p:clrMapOvr>
+    <a:masterClrMapping/>
+  </p:clrMapOvr>
+</p:sld>
+</file>
+
+<file path=ppt/slides/slide33.xml><?xml version="1.0" encoding="utf-8"?>
+<p:sld xmlns:a="http://schemas.openxmlformats.org/drawingml/2006/main" xmlns:r="http://schemas.openxmlformats.org/officeDocument/2006/relationships" xmlns:p="http://schemas.openxmlformats.org/presentationml/2006/main">
+  <p:cSld>
+    <p:spTree>
+      <p:nvGrpSpPr>
+        <p:cNvPr id="1" name=""/>
+        <p:cNvGrpSpPr/>
+        <p:nvPr/>
+      </p:nvGrpSpPr>
+      <p:grpSpPr>
+        <a:xfrm>
+          <a:off x="0" y="0"/>
+          <a:ext cx="0" cy="0"/>
+          <a:chOff x="0" y="0"/>
+          <a:chExt cx="0" cy="0"/>
+        </a:xfrm>
+      </p:grpSpPr>
+      <p:sp>
+        <p:nvSpPr>
+          <p:cNvPr id="2" name="Title 1"/>
+          <p:cNvSpPr>
+            <a:spLocks noGrp="1"/>
+          </p:cNvSpPr>
+          <p:nvPr>
+            <p:ph type="title"/>
+          </p:nvPr>
+        </p:nvSpPr>
+        <p:spPr/>
+        <p:txBody>
+          <a:bodyPr/>
+          <a:lstStyle/>
+          <a:p>
+            <a:r>
+              <a:rPr lang="en-US" dirty="0"/>
+              <a:t>Lab </a:t>
+            </a:r>
+            <a:r>
+              <a:rPr lang="en-US"/>
+              <a:t>6.2 - </a:t>
+            </a:r>
+            <a:r>
+              <a:rPr lang="en-US" dirty="0"/>
+              <a:t>Shape Hierarchy with Polymorphism</a:t>
+            </a:r>
+          </a:p>
+        </p:txBody>
+      </p:sp>
+      <p:sp>
+        <p:nvSpPr>
+          <p:cNvPr id="3" name="Content Placeholder 2"/>
+          <p:cNvSpPr>
+            <a:spLocks noGrp="1"/>
+          </p:cNvSpPr>
+          <p:nvPr>
+            <p:ph idx="1"/>
+          </p:nvPr>
+        </p:nvSpPr>
+        <p:spPr/>
+        <p:txBody>
+          <a:bodyPr>
+            <a:normAutofit fontScale="92500" lnSpcReduction="20000"/>
+          </a:bodyPr>
+          <a:lstStyle/>
+          <a:p>
+            <a:pPr>
+              <a:buNone/>
+            </a:pPr>
+            <a:r>
+              <a:rPr lang="en-US" b="1" dirty="0"/>
+              <a:t>Goal:</a:t>
+            </a:r>
+            <a:r>
+              <a:rPr lang="en-US" dirty="0"/>
+              <a:t> use virtual / override so a Shape[] computes the right area for each element.</a:t>
+            </a:r>
+          </a:p>
+          <a:p>
+            <a:pPr>
+              <a:buNone/>
+            </a:pPr>
+            <a:r>
+              <a:rPr lang="en-US" b="1" dirty="0"/>
+              <a:t>Steps:</a:t>
+            </a:r>
+          </a:p>
+          <a:p>
+            <a:pPr marL="285750" indent="-285750">
+              <a:buFont typeface="+mj-lt"/>
+              <a:buAutoNum type="arabicPeriod"/>
+            </a:pPr>
+            <a:r>
+              <a:rPr lang="en-US" dirty="0"/>
+              <a:t>Define </a:t>
+            </a:r>
+            <a:r>
+              <a:rPr lang="en-US" dirty="0">
+                <a:latin typeface="Consolas"/>
+              </a:rPr>
+              <a:t>class Shape</a:t>
+            </a:r>
+            <a:r>
+              <a:rPr lang="en-US" dirty="0"/>
+              <a:t> with </a:t>
+            </a:r>
+            <a:r>
+              <a:rPr lang="en-US" dirty="0">
+                <a:latin typeface="Consolas"/>
+              </a:rPr>
+              <a:t>public virtual double Area() =&gt; 0;</a:t>
+            </a:r>
+          </a:p>
+          <a:p>
+            <a:pPr marL="285750" indent="-285750">
+              <a:buFont typeface="+mj-lt"/>
+              <a:buAutoNum type="arabicPeriod"/>
+            </a:pPr>
+            <a:r>
+              <a:rPr lang="en-US" dirty="0"/>
+              <a:t>Derive </a:t>
+            </a:r>
+            <a:r>
+              <a:rPr lang="en-US" dirty="0">
+                <a:latin typeface="Consolas"/>
+              </a:rPr>
+              <a:t>Circle</a:t>
+            </a:r>
+            <a:r>
+              <a:rPr lang="en-US" dirty="0"/>
+              <a:t> (radius) — override Area to return </a:t>
+            </a:r>
+            <a:r>
+              <a:rPr lang="en-US" dirty="0">
+                <a:latin typeface="Consolas"/>
+              </a:rPr>
+              <a:t>Math.PI * r * r</a:t>
+            </a:r>
+          </a:p>
+          <a:p>
+            <a:pPr marL="285750" indent="-285750">
+              <a:buFont typeface="+mj-lt"/>
+              <a:buAutoNum type="arabicPeriod"/>
+            </a:pPr>
+            <a:r>
+              <a:rPr lang="en-US" dirty="0"/>
+              <a:t>Derive </a:t>
+            </a:r>
+            <a:r>
+              <a:rPr lang="en-US" dirty="0">
+                <a:latin typeface="Consolas"/>
+              </a:rPr>
+              <a:t>Rectangle</a:t>
+            </a:r>
+            <a:r>
+              <a:rPr lang="en-US" dirty="0"/>
+              <a:t> (width, height) — override Area to return </a:t>
+            </a:r>
+            <a:r>
+              <a:rPr lang="en-US" dirty="0">
+                <a:latin typeface="Consolas"/>
+              </a:rPr>
+              <a:t>w * h</a:t>
+            </a:r>
+          </a:p>
+          <a:p>
+            <a:pPr marL="285750" indent="-285750">
+              <a:buFont typeface="+mj-lt"/>
+              <a:buAutoNum type="arabicPeriod"/>
+            </a:pPr>
+            <a:r>
+              <a:rPr lang="en-US" dirty="0"/>
+              <a:t>Build </a:t>
+            </a:r>
+            <a:r>
+              <a:rPr lang="en-US" dirty="0">
+                <a:latin typeface="Consolas"/>
+              </a:rPr>
+              <a:t>Shape[] shapes = { new Circle(2), new Rectangle(3,4) };</a:t>
+            </a:r>
+          </a:p>
+          <a:p>
+            <a:pPr marL="285750" indent="-285750">
+              <a:buFont typeface="+mj-lt"/>
+              <a:buAutoNum type="arabicPeriod"/>
+            </a:pPr>
+            <a:r>
+              <a:rPr lang="en-US" dirty="0"/>
+              <a:t>Loop and print each </a:t>
+            </a:r>
+            <a:r>
+              <a:rPr lang="en-US" dirty="0">
+                <a:latin typeface="Consolas"/>
+              </a:rPr>
+              <a:t>s.Area()</a:t>
+            </a:r>
+            <a:r>
+              <a:rPr lang="en-US" dirty="0"/>
+              <a:t> — confirm each shape's own logic runs</a:t>
+            </a:r>
+          </a:p>
+          <a:p>
+            <a:pPr>
+              <a:buNone/>
+            </a:pPr>
+            <a:r>
+              <a:rPr lang="en-US" b="1" dirty="0"/>
+              <a:t>Stretch:</a:t>
+            </a:r>
+            <a:r>
+              <a:rPr lang="en-US" dirty="0"/>
+              <a:t> add a Triangle, an overloaded </a:t>
+            </a:r>
+            <a:r>
+              <a:rPr lang="en-US" dirty="0">
+                <a:latin typeface="Consolas"/>
+              </a:rPr>
+              <a:t>Scale(double)</a:t>
+            </a:r>
+            <a:r>
+              <a:rPr lang="en-US" dirty="0"/>
+              <a:t> method, and make Shape </a:t>
+            </a:r>
+            <a:r>
+              <a:rPr lang="en-US" dirty="0">
+                <a:latin typeface="Consolas"/>
+              </a:rPr>
+              <a:t>abstract</a:t>
+            </a:r>
+            <a:r>
+              <a:rPr lang="en-US" dirty="0"/>
+              <a:t>.</a:t>
+            </a:r>
+          </a:p>
+        </p:txBody>
+      </p:sp>
+    </p:spTree>
+    <p:extLst>
+      <p:ext uri="{BB962C8B-B14F-4D97-AF65-F5344CB8AC3E}">
+        <p14:creationId xmlns:p14="http://schemas.microsoft.com/office/powerpoint/2010/main" val="2731942090"/>
+      </p:ext>
+    </p:extLst>
+  </p:cSld>
+  <p:clrMapOvr>
+    <a:masterClrMapping/>
+  </p:clrMapOvr>
+</p:sld>
+</file>
+
+<file path=ppt/slides/slide4.xml><?xml version="1.0" encoding="utf-8"?>
+<p:sld xmlns:a="http://schemas.openxmlformats.org/drawingml/2006/main" xmlns:r="http://schemas.openxmlformats.org/officeDocument/2006/relationships" xmlns:p="http://schemas.openxmlformats.org/presentationml/2006/main">
+  <p:cSld>
+    <p:spTree>
+      <p:nvGrpSpPr>
+        <p:cNvPr id="1" name=""/>
+        <p:cNvGrpSpPr/>
+        <p:nvPr/>
+      </p:nvGrpSpPr>
+      <p:grpSpPr>
+        <a:xfrm>
+          <a:off x="0" y="0"/>
+          <a:ext cx="0" cy="0"/>
+          <a:chOff x="0" y="0"/>
+          <a:chExt cx="0" cy="0"/>
+        </a:xfrm>
+      </p:grpSpPr>
+      <p:sp>
+        <p:nvSpPr>
+          <p:cNvPr id="2" name="Title 1">
+            <a:extLst>
+              <a:ext uri="{FF2B5EF4-FFF2-40B4-BE49-F238E27FC236}">
+                <a16:creationId xmlns:a16="http://schemas.microsoft.com/office/drawing/2014/main" id="{00A02E84-1DA1-3481-57C0-5B22110044F3}"/>
+              </a:ext>
+            </a:extLst>
+          </p:cNvPr>
+          <p:cNvSpPr>
+            <a:spLocks noGrp="1"/>
+          </p:cNvSpPr>
+          <p:nvPr>
+            <p:ph type="title"/>
+          </p:nvPr>
+        </p:nvSpPr>
+        <p:spPr/>
+        <p:txBody>
+          <a:bodyPr/>
+          <a:lstStyle/>
+          <a:p>
+            <a:r>
+              <a:rPr lang="en-IN"/>
+              <a:t>The 'this' Keyword</a:t>
+            </a:r>
+          </a:p>
+        </p:txBody>
+      </p:sp>
+      <p:sp>
+        <p:nvSpPr>
+          <p:cNvPr id="3" name="Content Placeholder 2">
+            <a:extLst>
+              <a:ext uri="{FF2B5EF4-FFF2-40B4-BE49-F238E27FC236}">
+                <a16:creationId xmlns:a16="http://schemas.microsoft.com/office/drawing/2014/main" id="{3F9F76BF-6951-72FE-CC72-806C7AB583B6}"/>
+              </a:ext>
+            </a:extLst>
+          </p:cNvPr>
+          <p:cNvSpPr>
+            <a:spLocks noGrp="1"/>
+          </p:cNvSpPr>
+          <p:nvPr>
+            <p:ph idx="1"/>
+          </p:nvPr>
+        </p:nvSpPr>
+        <p:spPr/>
+        <p:txBody>
+          <a:bodyPr/>
+          <a:lstStyle/>
+          <a:p>
+            <a:r>
+              <a:rPr lang="en-US"/>
+              <a:t>Refers to the current instance of the class
+Disambiguates fields from parameters with the same name
+Lets one constructor call another (constructor chaining)
+Cannot be used inside static members
+Common use: this.name = name; inside a constructor</a:t>
+            </a:r>
+            <a:endParaRPr lang="en-IN"/>
+          </a:p>
+        </p:txBody>
+      </p:sp>
+    </p:spTree>
+    <p:extLst>
+      <p:ext uri="{BB962C8B-B14F-4D97-AF65-F5344CB8AC3E}">
+        <p14:creationId xmlns:p14="http://schemas.microsoft.com/office/powerpoint/2010/main" val="2202487652"/>
+      </p:ext>
+    </p:extLst>
   </p:cSld>
   <p:clrMapOvr>
     <a:masterClrMapping/>
@@ -17861,7 +21404,7 @@
           <a:lstStyle/>
           <a:p>
             <a:r>
-              <a:t>Constructors</a:t>
+              <a:t>Creating Objects</a:t>
             </a:r>
           </a:p>
         </p:txBody>
@@ -17882,22 +21425,80 @@
           <a:lstStyle/>
           <a:p>
             <a:r>
-              <a:t>Special method</a:t>
-            </a:r>
-          </a:p>
-          <a:p>
-            <a:r>
-              <a:t>Same name as class</a:t>
-            </a:r>
-          </a:p>
-          <a:p>
-            <a:r>
-              <a:t>Used to initialize objects</a:t>
+              <a:t>An object is an instance of a class</a:t>
+            </a:r>
+          </a:p>
+          <a:p>
+            <a:r>
+              <a:t>Use the </a:t>
+            </a:r>
+            <a:r>
+              <a:rPr lang="en-US" b="1" dirty="0">
+                <a:latin typeface="Consolas"/>
+              </a:rPr>
+              <a:t>new</a:t>
+            </a:r>
+            <a:r>
+              <a:t> keyword to allocate on the heap</a:t>
+            </a:r>
+          </a:p>
+          <a:p>
+            <a:r>
+              <a:t>Variable holds a reference, not the object itself</a:t>
+            </a:r>
+          </a:p>
+          <a:p>
+            <a:r>
+              <a:t>Access members with the dot operator</a:t>
+            </a:r>
+          </a:p>
+          <a:p>
+            <a:pPr>
+              <a:buNone/>
+            </a:pPr>
+            <a:endParaRPr lang="en-US"/>
+          </a:p>
+          <a:p>
+            <a:pPr>
+              <a:buNone/>
+            </a:pPr>
+            <a:r>
+              <a:rPr lang="en-US" sz="1600" dirty="0">
+                <a:latin typeface="Consolas"/>
+              </a:rPr>
+              <a:t>Person p = new Person();</a:t>
+            </a:r>
+          </a:p>
+          <a:p>
+            <a:pPr>
+              <a:buNone/>
+            </a:pPr>
+            <a:r>
+              <a:rPr lang="en-US" sz="1600" dirty="0">
+                <a:latin typeface="Consolas"/>
+              </a:rPr>
+              <a:t>p.Name = "John";</a:t>
+            </a:r>
+          </a:p>
+          <a:p>
+            <a:pPr>
+              <a:buNone/>
+            </a:pPr>
+            <a:r>
+              <a:rPr lang="en-US" sz="1600" dirty="0">
+                <a:latin typeface="Consolas"/>
+              </a:rPr>
+              <a:t>p.Greet();</a:t>
             </a:r>
           </a:p>
         </p:txBody>
       </p:sp>
     </p:spTree>
+    <p:extLst>
+      <p:ext uri="{BB962C8B-B14F-4D97-AF65-F5344CB8AC3E}">
+        <p14:creationId xmlns:p14="http://schemas.microsoft.com/office/powerpoint/2010/main" val="1609786448"/>
+      </p:ext>
+    </p:extLst>
   </p:cSld>
   <p:clrMapOvr>
     <a:masterClrMapping/>
@@ -17924,7 +21525,13 @@
       </p:grpSpPr>
       <p:sp>
         <p:nvSpPr>
-          <p:cNvPr id="2" name="Title 1"/>
+          <p:cNvPr id="2" name="Title 1">
+            <a:extLst>
+              <a:ext uri="{FF2B5EF4-FFF2-40B4-BE49-F238E27FC236}">
+                <a16:creationId xmlns:a16="http://schemas.microsoft.com/office/drawing/2014/main" id="{D4A6B64E-D398-D626-457B-57AC6E93EC23}"/>
+              </a:ext>
+            </a:extLst>
+          </p:cNvPr>
           <p:cNvSpPr>
             <a:spLocks noGrp="1"/>
           </p:cNvSpPr>
@@ -17938,14 +21545,21 @@
           <a:lstStyle/>
           <a:p>
             <a:r>
-              <a:t>Abstraction</a:t>
+              <a:rPr lang="en-IN" dirty="0"/>
+              <a:t>Lab 4.1 - First Class</a:t>
             </a:r>
           </a:p>
         </p:txBody>
       </p:sp>
       <p:sp>
         <p:nvSpPr>
-          <p:cNvPr id="3" name="Content Placeholder 2"/>
+          <p:cNvPr id="3" name="Content Placeholder 2">
+            <a:extLst>
+              <a:ext uri="{FF2B5EF4-FFF2-40B4-BE49-F238E27FC236}">
+                <a16:creationId xmlns:a16="http://schemas.microsoft.com/office/drawing/2014/main" id="{6E0C0046-CC43-E762-4080-8D6C1463845A}"/>
+              </a:ext>
+            </a:extLst>
+          </p:cNvPr>
           <p:cNvSpPr>
             <a:spLocks noGrp="1"/>
           </p:cNvSpPr>
@@ -17959,17 +21573,61 @@
           <a:lstStyle/>
           <a:p>
             <a:r>
-              <a:t>Hiding implementation</a:t>
-            </a:r>
-          </a:p>
-          <a:p>
-            <a:r>
-              <a:t>Using abstract classes &amp; interfaces</a:t>
+              <a:rPr lang="en-US" b="1" dirty="0"/>
+              <a:t>Goal:</a:t>
+            </a:r>
+            <a:r>
+              <a:t> create your first C# class and instantiate it</a:t>
+            </a:r>
+          </a:p>
+          <a:p>
+            <a:r>
+              <a:rPr lang="en-US" b="1" dirty="0"/>
+              <a:t>Steps:</a:t>
+            </a:r>
+          </a:p>
+          <a:p>
+            <a:r>
+              <a:t>1. Create a Book class with Title and Author properties</a:t>
+            </a:r>
+          </a:p>
+          <a:p>
+            <a:r>
+              <a:t>2. Add a parameterless constructor and a parameterised one</a:t>
+            </a:r>
+          </a:p>
+          <a:p>
+            <a:r>
+              <a:t>3. Add a Describe() method that returns "&lt;Title&gt; by &lt;Author&gt;"</a:t>
+            </a:r>
+          </a:p>
+          <a:p>
+            <a:r>
+              <a:t>4. In Main(), create two Book objects using each constructor</a:t>
+            </a:r>
+          </a:p>
+          <a:p>
+            <a:r>
+              <a:t>5. Print Describe() for both</a:t>
+            </a:r>
+          </a:p>
+          <a:p>
+            <a:r>
+              <a:rPr lang="en-US" b="1" dirty="0"/>
+              <a:t>Stretch:</a:t>
+            </a:r>
+            <a:r>
+              <a:t> add a PageCount property and include it in Describe()</a:t>
             </a:r>
           </a:p>
         </p:txBody>
       </p:sp>
     </p:spTree>
+    <p:extLst>
+      <p:ext uri="{BB962C8B-B14F-4D97-AF65-F5344CB8AC3E}">
+        <p14:creationId xmlns:p14="http://schemas.microsoft.com/office/powerpoint/2010/main" val="3909568865"/>
+      </p:ext>
+    </p:extLst>
   </p:cSld>
   <p:clrMapOvr>
     <a:masterClrMapping/>
@@ -18010,7 +21668,7 @@
           <a:lstStyle/>
           <a:p>
             <a:r>
-              <a:t>Encapsulation</a:t>
+              <a:t>Constructors</a:t>
             </a:r>
           </a:p>
         </p:txBody>
@@ -18031,17 +21689,82 @@
           <a:lstStyle/>
           <a:p>
             <a:r>
-              <a:t>Wrapping data</a:t>
-            </a:r>
-          </a:p>
-          <a:p>
-            <a:r>
-              <a:t>Using private fields + public properties</a:t>
+              <a:t>Special method that initialises a new object</a:t>
+            </a:r>
+          </a:p>
+          <a:p>
+            <a:r>
+              <a:t>Same name as the class; no return type</a:t>
+            </a:r>
+          </a:p>
+          <a:p>
+            <a:r>
+              <a:t>Default (parameterless) constructor is provided if you write none</a:t>
+            </a:r>
+          </a:p>
+          <a:p>
+            <a:r>
+              <a:t>Can be overloaded with different parameter lists</a:t>
+            </a:r>
+          </a:p>
+          <a:p>
+            <a:pPr>
+              <a:buNone/>
+            </a:pPr>
+            <a:endParaRPr lang="en-US"/>
+          </a:p>
+          <a:p>
+            <a:pPr>
+              <a:buNone/>
+            </a:pPr>
+            <a:r>
+              <a:rPr lang="en-US" sz="1600" dirty="0">
+                <a:latin typeface="Consolas"/>
+              </a:rPr>
+              <a:t>public Person(string name, int age) {</a:t>
+            </a:r>
+          </a:p>
+          <a:p>
+            <a:pPr>
+              <a:buNone/>
+            </a:pPr>
+            <a:r>
+              <a:rPr lang="en-US" sz="1600" dirty="0">
+                <a:latin typeface="Consolas"/>
+              </a:rPr>
+              <a:t>    this.name = name;</a:t>
+            </a:r>
+          </a:p>
+          <a:p>
+            <a:pPr>
+              <a:buNone/>
+            </a:pPr>
+            <a:r>
+              <a:rPr lang="en-US" sz="1600" dirty="0">
+                <a:latin typeface="Consolas"/>
+              </a:rPr>
+              <a:t>    this.age = age;</a:t>
+            </a:r>
+          </a:p>
+          <a:p>
+            <a:pPr>
+              <a:buNone/>
+            </a:pPr>
+            <a:r>
+              <a:rPr lang="en-US" sz="1600" dirty="0">
+                <a:latin typeface="Consolas"/>
+              </a:rPr>
+              <a:t>}</a:t>
             </a:r>
           </a:p>
         </p:txBody>
       </p:sp>
     </p:spTree>
+    <p:extLst>
+      <p:ext uri="{BB962C8B-B14F-4D97-AF65-F5344CB8AC3E}">
+        <p14:creationId xmlns:p14="http://schemas.microsoft.com/office/powerpoint/2010/main" val="3700800615"/>
+      </p:ext>
+    </p:extLst>
   </p:cSld>
   <p:clrMapOvr>
     <a:masterClrMapping/>
@@ -18068,7 +21791,13 @@
       </p:grpSpPr>
       <p:sp>
         <p:nvSpPr>
-          <p:cNvPr id="2" name="Title 1"/>
+          <p:cNvPr id="2" name="Title 1">
+            <a:extLst>
+              <a:ext uri="{FF2B5EF4-FFF2-40B4-BE49-F238E27FC236}">
+                <a16:creationId xmlns:a16="http://schemas.microsoft.com/office/drawing/2014/main" id="{3B1D6A85-FAC2-B796-C9E9-125C211CBBC1}"/>
+              </a:ext>
+            </a:extLst>
+          </p:cNvPr>
           <p:cNvSpPr>
             <a:spLocks noGrp="1"/>
           </p:cNvSpPr>
@@ -18082,14 +21811,21 @@
           <a:lstStyle/>
           <a:p>
             <a:r>
-              <a:t>Properties in C#</a:t>
+              <a:rPr lang="en-IN"/>
+              <a:t>Access Modifiers</a:t>
             </a:r>
           </a:p>
         </p:txBody>
       </p:sp>
       <p:sp>
         <p:nvSpPr>
-          <p:cNvPr id="3" name="Content Placeholder 2"/>
+          <p:cNvPr id="3" name="Content Placeholder 2">
+            <a:extLst>
+              <a:ext uri="{FF2B5EF4-FFF2-40B4-BE49-F238E27FC236}">
+                <a16:creationId xmlns:a16="http://schemas.microsoft.com/office/drawing/2014/main" id="{0377F638-B0FD-E623-C737-6DFAFE6BBA6B}"/>
+              </a:ext>
+            </a:extLst>
+          </p:cNvPr>
           <p:cNvSpPr>
             <a:spLocks noGrp="1"/>
           </p:cNvSpPr>
@@ -18103,12 +21839,25 @@
           <a:lstStyle/>
           <a:p>
             <a:r>
-              <a:t>public string Name { get; set; }</a:t>
-            </a:r>
+              <a:rPr lang="en-US"/>
+              <a:t>Control visibility of types and members
+public — visible everywhere
+private — only inside the same class (default for class members)
+protected — same class + derived classes
+internal — same assembly only
+protected internal — same assembly OR derived class
+Rule of thumb: start private, open up only when needed</a:t>
+            </a:r>
+            <a:endParaRPr lang="en-IN"/>
           </a:p>
         </p:txBody>
       </p:sp>
     </p:spTree>
+    <p:extLst>
+      <p:ext uri="{BB962C8B-B14F-4D97-AF65-F5344CB8AC3E}">
+        <p14:creationId xmlns:p14="http://schemas.microsoft.com/office/powerpoint/2010/main" val="1526684105"/>
+      </p:ext>
+    </p:extLst>
   </p:cSld>
   <p:clrMapOvr>
     <a:masterClrMapping/>
@@ -18149,7 +21898,7 @@
           <a:lstStyle/>
           <a:p>
             <a:r>
-              <a:t>Hands-On Lab (Module 4)</a:t>
+              <a:t>Abstraction</a:t>
             </a:r>
           </a:p>
         </p:txBody>
@@ -18170,22 +21919,42 @@
           <a:lstStyle/>
           <a:p>
             <a:r>
-              <a:t>Create Student class</a:t>
-            </a:r>
-          </a:p>
-          <a:p>
-            <a:r>
-              <a:t>Add properties</a:t>
-            </a:r>
-          </a:p>
-          <a:p>
-            <a:r>
-              <a:t>Use constructor</a:t>
+              <a:t>Show only what matters; hide the rest</a:t>
+            </a:r>
+          </a:p>
+          <a:p>
+            <a:r>
+              <a:t>Expose behaviour through a clean public surface</a:t>
+            </a:r>
+          </a:p>
+          <a:p>
+            <a:r>
+              <a:t>Internal details can change without breaking callers</a:t>
+            </a:r>
+          </a:p>
+          <a:p>
+            <a:r>
+              <a:t>Achieved with abstract classes and interfaces</a:t>
+            </a:r>
+          </a:p>
+          <a:p>
+            <a:r>
+              <a:t>Example: you drive a car using the steering wheel — you do not need to know how the engine works</a:t>
+            </a:r>
+          </a:p>
+          <a:p>
+            <a:r>
+              <a:t>Reduces complexity and improves maintainability</a:t>
             </a:r>
           </a:p>
         </p:txBody>
       </p:sp>
     </p:spTree>
+    <p:extLst>
+      <p:ext uri="{BB962C8B-B14F-4D97-AF65-F5344CB8AC3E}">
+        <p14:creationId xmlns:p14="http://schemas.microsoft.com/office/powerpoint/2010/main" val="2034953936"/>
+      </p:ext>
+    </p:extLst>
   </p:cSld>
   <p:clrMapOvr>
     <a:masterClrMapping/>
@@ -18459,4 +22228,26 @@
     </a:ext>
   </a:extLst>
 </a:theme>
+</file>
+
+<file path=ppt/webextensions/taskpanes.xml><?xml version="1.0" encoding="utf-8"?>
+<wetp:taskpanes xmlns:wetp="http://schemas.microsoft.com/office/webextensions/taskpanes/2010/11">
+  <wetp:taskpane dockstate="right" visibility="0" width="438" row="1">
+    <wetp:webextensionref xmlns:r="http://schemas.openxmlformats.org/officeDocument/2006/relationships" r:id="rId1"/>
+  </wetp:taskpane>
+</wetp:taskpanes>
+</file>
+
+<file path=ppt/webextensions/webextension1.xml><?xml version="1.0" encoding="utf-8"?>
+<we:webextension xmlns:we="http://schemas.microsoft.com/office/webextensions/webextension/2010/11" id="{4B29D715-2C14-4336-8954-986A0CC26114}">
+  <we:reference id="WA200010001" version="1.0.0.1" store="Omex" storeType="OMEX"/>
+  <we:alternateReferences>
+    <we:reference id="WA200010001" version="1.0.0.1" store="WA200010001" storeType="OMEX"/>
+  </we:alternateReferences>
+  <we:properties>
+    <we:property name="claude.fileId" value="&quot;f9e37c4f-3070-400a-97e4-60baebecf73d&quot;"/>
+  </we:properties>
+  <we:bindings/>
+  <we:snapshot xmlns:r="http://schemas.openxmlformats.org/officeDocument/2006/relationships"/>
+</we:webextension>
 </file>